--- a/a7/build/out/u4/A7 4.02  Slides.pptx
+++ b/a7/build/out/u4/A7 4.02  Slides.pptx
@@ -9830,7 +9830,7 @@
                 </a:solidFill>
                 <a:latin typeface="Century Schoolbook"/>
               </a:rPr>
-              <a:t>1</a:t>
+              <a:t>-1</a:t>
             </a:r>
           </a:p>
         </p:txBody>
@@ -10399,7 +10399,7 @@
                 </a:solidFill>
                 <a:latin typeface="Century Schoolbook"/>
               </a:rPr>
-              <a:t>1</a:t>
+              <a:t>-1</a:t>
             </a:r>
           </a:p>
         </p:txBody>

--- a/a7/build/out/u4/A7 4.02  Slides.pptx
+++ b/a7/build/out/u4/A7 4.02  Slides.pptx
@@ -3817,7 +3817,7 @@
       </p:sp>
       <p:pic>
         <p:nvPicPr>
-          <p:cNvPr id="9" name="Picture 8" descr="945d13953f7af1b2.png"/>
+          <p:cNvPr id="9" name="Picture 8" descr="02a20b9238011d7b.png"/>
           <p:cNvPicPr>
             <a:picLocks noChangeAspect="1"/>
           </p:cNvPicPr>
@@ -3831,8 +3831,8 @@
         </p:blipFill>
         <p:spPr>
           <a:xfrm>
-            <a:off x="4012691" y="2194560"/>
-            <a:ext cx="4136136" cy="518160"/>
+            <a:off x="4011168" y="2194560"/>
+            <a:ext cx="4139183" cy="521207"/>
           </a:xfrm>
           <a:prstGeom prst="rect">
             <a:avLst/>
@@ -3847,7 +3847,7 @@
         </p:nvSpPr>
         <p:spPr>
           <a:xfrm>
-            <a:off x="777240" y="3032760"/>
+            <a:off x="777240" y="3035808"/>
             <a:ext cx="10607040" cy="429370"/>
           </a:xfrm>
           <a:prstGeom prst="rect">
@@ -4201,7 +4201,7 @@
       </p:sp>
       <p:pic>
         <p:nvPicPr>
-          <p:cNvPr id="9" name="Picture 8" descr="1d1311c3c441be33.png"/>
+          <p:cNvPr id="9" name="Picture 8" descr="d048c7fc436d6617.png"/>
           <p:cNvPicPr>
             <a:picLocks noChangeAspect="1"/>
           </p:cNvPicPr>
@@ -4215,8 +4215,8 @@
         </p:blipFill>
         <p:spPr>
           <a:xfrm>
-            <a:off x="4974336" y="2103120"/>
-            <a:ext cx="2212848" cy="658368"/>
+            <a:off x="4501896" y="2103120"/>
+            <a:ext cx="3157728" cy="886968"/>
           </a:xfrm>
           <a:prstGeom prst="rect">
             <a:avLst/>
@@ -4231,7 +4231,7 @@
         </p:nvSpPr>
         <p:spPr>
           <a:xfrm>
-            <a:off x="777240" y="3264408"/>
+            <a:off x="777240" y="3493008"/>
             <a:ext cx="10607040" cy="429370"/>
           </a:xfrm>
           <a:prstGeom prst="rect">
@@ -4523,7 +4523,7 @@
       </p:sp>
       <p:pic>
         <p:nvPicPr>
-          <p:cNvPr id="9" name="Picture 8" descr="73c9927432c7562b.png"/>
+          <p:cNvPr id="9" name="Picture 8" descr="6b3f0849106cd4b7.png"/>
           <p:cNvPicPr>
             <a:picLocks noChangeAspect="1"/>
           </p:cNvPicPr>
@@ -4538,7 +4538,7 @@
         <p:spPr>
           <a:xfrm>
             <a:off x="1828800" y="1920240"/>
-            <a:ext cx="4861560" cy="414528"/>
+            <a:ext cx="4861560" cy="411480"/>
           </a:xfrm>
           <a:prstGeom prst="rect">
             <a:avLst/>
@@ -4553,7 +4553,7 @@
         </p:nvSpPr>
         <p:spPr>
           <a:xfrm>
-            <a:off x="7147560" y="1898904"/>
+            <a:off x="7147560" y="1897380"/>
             <a:ext cx="4236720" cy="502920"/>
           </a:xfrm>
           <a:prstGeom prst="rect">
@@ -4582,7 +4582,7 @@
       </p:sp>
       <p:pic>
         <p:nvPicPr>
-          <p:cNvPr id="11" name="Picture 10" descr="8e48cf523ce2dbd2.png"/>
+          <p:cNvPr id="11" name="Picture 10" descr="1c6ad9425b8dfd75.png"/>
           <p:cNvPicPr>
             <a:picLocks noChangeAspect="1"/>
           </p:cNvPicPr>
@@ -4596,8 +4596,8 @@
         </p:blipFill>
         <p:spPr>
           <a:xfrm>
-            <a:off x="1828800" y="2609087"/>
-            <a:ext cx="2727960" cy="615696"/>
+            <a:off x="1828800" y="2606040"/>
+            <a:ext cx="3139440" cy="826008"/>
           </a:xfrm>
           <a:prstGeom prst="rect">
             <a:avLst/>
@@ -4612,8 +4612,8 @@
         </p:nvSpPr>
         <p:spPr>
           <a:xfrm>
-            <a:off x="5013960" y="2688335"/>
-            <a:ext cx="6370319" cy="502920"/>
+            <a:off x="5425440" y="2790444"/>
+            <a:ext cx="5958839" cy="502920"/>
           </a:xfrm>
           <a:prstGeom prst="rect">
             <a:avLst/>
@@ -4641,7 +4641,7 @@
       </p:sp>
       <p:pic>
         <p:nvPicPr>
-          <p:cNvPr id="13" name="Picture 12" descr="ef33542baace30d4.png"/>
+          <p:cNvPr id="13" name="Picture 12" descr="6aefb1689d23fb3c.png"/>
           <p:cNvPicPr>
             <a:picLocks noChangeAspect="1"/>
           </p:cNvPicPr>
@@ -4655,7 +4655,7 @@
         </p:blipFill>
         <p:spPr>
           <a:xfrm>
-            <a:off x="1828800" y="3499103"/>
+            <a:off x="1828800" y="3706368"/>
             <a:ext cx="3133344" cy="353568"/>
           </a:xfrm>
           <a:prstGeom prst="rect">
@@ -4671,7 +4671,7 @@
         </p:nvSpPr>
         <p:spPr>
           <a:xfrm>
-            <a:off x="5419344" y="3447287"/>
+            <a:off x="5419344" y="3654552"/>
             <a:ext cx="5964935" cy="502920"/>
           </a:xfrm>
           <a:prstGeom prst="rect">
@@ -5007,7 +5007,7 @@
       </p:sp>
       <p:pic>
         <p:nvPicPr>
-          <p:cNvPr id="9" name="Picture 8" descr="6ee99d863f496299.png"/>
+          <p:cNvPr id="9" name="Picture 8" descr="d9eedbeb2084bf5c.png"/>
           <p:cNvPicPr>
             <a:picLocks noChangeAspect="1"/>
           </p:cNvPicPr>
@@ -5021,8 +5021,8 @@
         </p:blipFill>
         <p:spPr>
           <a:xfrm>
-            <a:off x="4747260" y="2194560"/>
-            <a:ext cx="2667000" cy="829056"/>
+            <a:off x="4177284" y="2194560"/>
+            <a:ext cx="3806952" cy="1109472"/>
           </a:xfrm>
           <a:prstGeom prst="rect">
             <a:avLst/>
@@ -5294,7 +5294,7 @@
       </p:sp>
       <p:pic>
         <p:nvPicPr>
-          <p:cNvPr id="9" name="Picture 8" descr="6ee99d863f496299.png"/>
+          <p:cNvPr id="9" name="Picture 8" descr="914658bc6d4d66f9.png"/>
           <p:cNvPicPr>
             <a:picLocks noChangeAspect="1"/>
           </p:cNvPicPr>
@@ -5308,8 +5308,8 @@
         </p:blipFill>
         <p:spPr>
           <a:xfrm>
-            <a:off x="4747260" y="2194560"/>
-            <a:ext cx="2667000" cy="829056"/>
+            <a:off x="4178807" y="2194560"/>
+            <a:ext cx="3803904" cy="1109472"/>
           </a:xfrm>
           <a:prstGeom prst="rect">
             <a:avLst/>
@@ -5324,7 +5324,7 @@
         </p:nvSpPr>
         <p:spPr>
           <a:xfrm>
-            <a:off x="777240" y="3343656"/>
+            <a:off x="777240" y="3624072"/>
             <a:ext cx="10607040" cy="429370"/>
           </a:xfrm>
           <a:prstGeom prst="rect">
@@ -6044,7 +6044,7 @@
       </p:sp>
       <p:pic>
         <p:nvPicPr>
-          <p:cNvPr id="9" name="Picture 8" descr="a47a82f506d1e533.png"/>
+          <p:cNvPr id="9" name="Picture 8" descr="31fb752d70c62789.png"/>
           <p:cNvPicPr>
             <a:picLocks noChangeAspect="1"/>
           </p:cNvPicPr>
@@ -6058,8 +6058,8 @@
         </p:blipFill>
         <p:spPr>
           <a:xfrm>
-            <a:off x="4675632" y="2103120"/>
-            <a:ext cx="2810256" cy="414528"/>
+            <a:off x="4674108" y="2103120"/>
+            <a:ext cx="2813304" cy="411480"/>
           </a:xfrm>
           <a:prstGeom prst="rect">
             <a:avLst/>
@@ -6074,7 +6074,7 @@
         </p:nvSpPr>
         <p:spPr>
           <a:xfrm>
-            <a:off x="1828800" y="2837687"/>
+            <a:off x="1828800" y="2834639"/>
             <a:ext cx="8503920" cy="548640"/>
           </a:xfrm>
           <a:prstGeom prst="rect">
@@ -6443,8 +6443,8 @@
         </p:nvSpPr>
         <p:spPr>
           <a:xfrm>
-            <a:off x="2445003" y="2171700"/>
-            <a:ext cx="3129280" cy="457200"/>
+            <a:off x="2669526" y="2171700"/>
+            <a:ext cx="3042590" cy="457200"/>
           </a:xfrm>
           <a:prstGeom prst="rect">
             <a:avLst/>
@@ -6453,7 +6453,7 @@
         </p:spPr>
         <p:txBody>
           <a:bodyPr wrap="none" lIns="45720" rIns="45720" tIns="18288" bIns="18288" anchor="ctr">
-            <a:spAutoFit/>
+            <a:noAutofit/>
           </a:bodyPr>
           <a:lstStyle/>
           <a:p>
@@ -6486,7 +6486,7 @@
         </p:blipFill>
         <p:spPr>
           <a:xfrm>
-            <a:off x="5437124" y="2225040"/>
+            <a:off x="5574957" y="2225040"/>
             <a:ext cx="1115568" cy="350520"/>
           </a:xfrm>
           <a:prstGeom prst="rect">
@@ -6502,8 +6502,8 @@
         </p:nvSpPr>
         <p:spPr>
           <a:xfrm>
-            <a:off x="6552692" y="2171700"/>
-            <a:ext cx="3300984" cy="457200"/>
+            <a:off x="6690525" y="2171700"/>
+            <a:ext cx="2938628" cy="457200"/>
           </a:xfrm>
           <a:prstGeom prst="rect">
             <a:avLst/>
@@ -6512,7 +6512,7 @@
         </p:spPr>
         <p:txBody>
           <a:bodyPr wrap="none" lIns="45720" rIns="45720" tIns="18288" bIns="18288" anchor="ctr">
-            <a:spAutoFit/>
+            <a:noAutofit/>
           </a:bodyPr>
           <a:lstStyle/>
           <a:p>
@@ -6537,8 +6537,8 @@
         </p:nvSpPr>
         <p:spPr>
           <a:xfrm>
-            <a:off x="1001776" y="2857500"/>
-            <a:ext cx="2442464" cy="457200"/>
+            <a:off x="1505585" y="2857500"/>
+            <a:ext cx="2070171" cy="457200"/>
           </a:xfrm>
           <a:prstGeom prst="rect">
             <a:avLst/>
@@ -6547,7 +6547,7 @@
         </p:spPr>
         <p:txBody>
           <a:bodyPr wrap="none" lIns="45720" rIns="45720" tIns="18288" bIns="18288" anchor="ctr">
-            <a:spAutoFit/>
+            <a:noAutofit/>
           </a:bodyPr>
           <a:lstStyle/>
           <a:p>
@@ -6580,7 +6580,7 @@
         </p:blipFill>
         <p:spPr>
           <a:xfrm>
-            <a:off x="3307080" y="2912364"/>
+            <a:off x="3438596" y="2912364"/>
             <a:ext cx="1426464" cy="347472"/>
           </a:xfrm>
           <a:prstGeom prst="rect">
@@ -6596,8 +6596,8 @@
         </p:nvSpPr>
         <p:spPr>
           <a:xfrm>
-            <a:off x="4733544" y="2857500"/>
-            <a:ext cx="6563360" cy="457200"/>
+            <a:off x="4865060" y="2857500"/>
+            <a:ext cx="5928033" cy="457200"/>
           </a:xfrm>
           <a:prstGeom prst="rect">
             <a:avLst/>
@@ -6606,7 +6606,7 @@
         </p:spPr>
         <p:txBody>
           <a:bodyPr wrap="none" lIns="45720" rIns="45720" tIns="18288" bIns="18288" anchor="ctr">
-            <a:spAutoFit/>
+            <a:noAutofit/>
           </a:bodyPr>
           <a:lstStyle/>
           <a:p>
@@ -6999,8 +6999,8 @@
         </p:nvSpPr>
         <p:spPr>
           <a:xfrm>
-            <a:off x="2445003" y="2080260"/>
-            <a:ext cx="3129280" cy="457200"/>
+            <a:off x="2669526" y="2080260"/>
+            <a:ext cx="3042590" cy="457200"/>
           </a:xfrm>
           <a:prstGeom prst="rect">
             <a:avLst/>
@@ -7009,7 +7009,7 @@
         </p:spPr>
         <p:txBody>
           <a:bodyPr wrap="none" lIns="45720" rIns="45720" tIns="18288" bIns="18288" anchor="ctr">
-            <a:spAutoFit/>
+            <a:noAutofit/>
           </a:bodyPr>
           <a:lstStyle/>
           <a:p>
@@ -7028,7 +7028,7 @@
       </p:sp>
       <p:pic>
         <p:nvPicPr>
-          <p:cNvPr id="10" name="Picture 9" descr="bbf6963a68a0084b.png"/>
+          <p:cNvPr id="10" name="Picture 9" descr="112c6d7561d1ceb4.png"/>
           <p:cNvPicPr>
             <a:picLocks noChangeAspect="1"/>
           </p:cNvPicPr>
@@ -7042,7 +7042,7 @@
         </p:blipFill>
         <p:spPr>
           <a:xfrm>
-            <a:off x="5437124" y="2133599"/>
+            <a:off x="5574957" y="2133599"/>
             <a:ext cx="1115568" cy="350520"/>
           </a:xfrm>
           <a:prstGeom prst="rect">
@@ -7058,8 +7058,8 @@
         </p:nvSpPr>
         <p:spPr>
           <a:xfrm>
-            <a:off x="6552692" y="2080260"/>
-            <a:ext cx="3300984" cy="457200"/>
+            <a:off x="6690525" y="2080260"/>
+            <a:ext cx="2938628" cy="457200"/>
           </a:xfrm>
           <a:prstGeom prst="rect">
             <a:avLst/>
@@ -7068,7 +7068,7 @@
         </p:spPr>
         <p:txBody>
           <a:bodyPr wrap="none" lIns="45720" rIns="45720" tIns="18288" bIns="18288" anchor="ctr">
-            <a:spAutoFit/>
+            <a:noAutofit/>
           </a:bodyPr>
           <a:lstStyle/>
           <a:p>
@@ -7093,8 +7093,8 @@
         </p:nvSpPr>
         <p:spPr>
           <a:xfrm>
-            <a:off x="1001776" y="2766060"/>
-            <a:ext cx="2442464" cy="457200"/>
+            <a:off x="1505585" y="2766060"/>
+            <a:ext cx="2070171" cy="457200"/>
           </a:xfrm>
           <a:prstGeom prst="rect">
             <a:avLst/>
@@ -7103,7 +7103,7 @@
         </p:spPr>
         <p:txBody>
           <a:bodyPr wrap="none" lIns="45720" rIns="45720" tIns="18288" bIns="18288" anchor="ctr">
-            <a:spAutoFit/>
+            <a:noAutofit/>
           </a:bodyPr>
           <a:lstStyle/>
           <a:p>
@@ -7122,7 +7122,7 @@
       </p:sp>
       <p:pic>
         <p:nvPicPr>
-          <p:cNvPr id="13" name="Picture 12" descr="0a0363f6ab46a485.png"/>
+          <p:cNvPr id="13" name="Picture 12" descr="5f24531f1f03185a.png"/>
           <p:cNvPicPr>
             <a:picLocks noChangeAspect="1"/>
           </p:cNvPicPr>
@@ -7136,7 +7136,7 @@
         </p:blipFill>
         <p:spPr>
           <a:xfrm>
-            <a:off x="3307080" y="2820924"/>
+            <a:off x="3438596" y="2820924"/>
             <a:ext cx="1426464" cy="347472"/>
           </a:xfrm>
           <a:prstGeom prst="rect">
@@ -7152,8 +7152,8 @@
         </p:nvSpPr>
         <p:spPr>
           <a:xfrm>
-            <a:off x="4733544" y="2766060"/>
-            <a:ext cx="6563360" cy="457200"/>
+            <a:off x="4865060" y="2766060"/>
+            <a:ext cx="5928033" cy="457200"/>
           </a:xfrm>
           <a:prstGeom prst="rect">
             <a:avLst/>
@@ -7162,7 +7162,7 @@
         </p:spPr>
         <p:txBody>
           <a:bodyPr wrap="none" lIns="45720" rIns="45720" tIns="18288" bIns="18288" anchor="ctr">
-            <a:spAutoFit/>
+            <a:noAutofit/>
           </a:bodyPr>
           <a:lstStyle/>
           <a:p>
@@ -7576,7 +7576,7 @@
       </p:sp>
       <p:pic>
         <p:nvPicPr>
-          <p:cNvPr id="9" name="Picture 8" descr="da75ff8038d9e849.png"/>
+          <p:cNvPr id="9" name="Picture 8" descr="f43a30d4653d07e7.png"/>
           <p:cNvPicPr>
             <a:picLocks noChangeAspect="1"/>
           </p:cNvPicPr>
@@ -7590,8 +7590,8 @@
         </p:blipFill>
         <p:spPr>
           <a:xfrm>
-            <a:off x="5567172" y="2194560"/>
-            <a:ext cx="1027176" cy="615696"/>
+            <a:off x="5349240" y="2194560"/>
+            <a:ext cx="1463040" cy="822960"/>
           </a:xfrm>
           <a:prstGeom prst="rect">
             <a:avLst/>
@@ -7940,7 +7940,7 @@
         <p:spPr>
           <a:xfrm>
             <a:off x="1874519" y="1760220"/>
-            <a:ext cx="969771" cy="457200"/>
+            <a:ext cx="720605" cy="457200"/>
           </a:xfrm>
           <a:prstGeom prst="rect">
             <a:avLst/>
@@ -7949,7 +7949,7 @@
         </p:spPr>
         <p:txBody>
           <a:bodyPr wrap="none" lIns="45720" rIns="45720" tIns="18288" bIns="18288" anchor="ctr">
-            <a:spAutoFit/>
+            <a:noAutofit/>
           </a:bodyPr>
           <a:lstStyle/>
           <a:p>
@@ -7982,7 +7982,7 @@
         </p:blipFill>
         <p:spPr>
           <a:xfrm>
-            <a:off x="2707132" y="1821180"/>
+            <a:off x="2457965" y="1821180"/>
             <a:ext cx="3099816" cy="335280"/>
           </a:xfrm>
           <a:prstGeom prst="rect">
@@ -7998,8 +7998,8 @@
         </p:nvSpPr>
         <p:spPr>
           <a:xfrm>
-            <a:off x="1874519" y="2415540"/>
-            <a:ext cx="4159504" cy="457200"/>
+            <a:off x="1874519" y="2500884"/>
+            <a:ext cx="3704805" cy="457200"/>
           </a:xfrm>
           <a:prstGeom prst="rect">
             <a:avLst/>
@@ -8008,7 +8008,7 @@
         </p:spPr>
         <p:txBody>
           <a:bodyPr wrap="none" lIns="45720" rIns="45720" tIns="18288" bIns="18288" anchor="ctr">
-            <a:spAutoFit/>
+            <a:noAutofit/>
           </a:bodyPr>
           <a:lstStyle/>
           <a:p>
@@ -8027,7 +8027,7 @@
       </p:sp>
       <p:pic>
         <p:nvPicPr>
-          <p:cNvPr id="12" name="Picture 11" descr="c33197799160426b.png"/>
+          <p:cNvPr id="12" name="Picture 11" descr="911d175e68347695.png"/>
           <p:cNvPicPr>
             <a:picLocks noChangeAspect="1"/>
           </p:cNvPicPr>
@@ -8041,8 +8041,8 @@
         </p:blipFill>
         <p:spPr>
           <a:xfrm>
-            <a:off x="5896864" y="2395728"/>
-            <a:ext cx="329184" cy="496824"/>
+            <a:off x="5442165" y="2395728"/>
+            <a:ext cx="469392" cy="667512"/>
           </a:xfrm>
           <a:prstGeom prst="rect">
             <a:avLst/>
@@ -8057,8 +8057,8 @@
         </p:nvSpPr>
         <p:spPr>
           <a:xfrm>
-            <a:off x="1874519" y="3070860"/>
-            <a:ext cx="3551936" cy="457200"/>
+            <a:off x="1874519" y="3241548"/>
+            <a:ext cx="3064939" cy="457200"/>
           </a:xfrm>
           <a:prstGeom prst="rect">
             <a:avLst/>
@@ -8067,7 +8067,7 @@
         </p:spPr>
         <p:txBody>
           <a:bodyPr wrap="none" lIns="45720" rIns="45720" tIns="18288" bIns="18288" anchor="ctr">
-            <a:spAutoFit/>
+            <a:noAutofit/>
           </a:bodyPr>
           <a:lstStyle/>
           <a:p>
@@ -8100,7 +8100,7 @@
         </p:blipFill>
         <p:spPr>
           <a:xfrm>
-            <a:off x="5289296" y="3095244"/>
+            <a:off x="4802299" y="3265932"/>
             <a:ext cx="853440" cy="408432"/>
           </a:xfrm>
           <a:prstGeom prst="rect">
@@ -8116,8 +8116,8 @@
         </p:nvSpPr>
         <p:spPr>
           <a:xfrm>
-            <a:off x="1874519" y="3691128"/>
-            <a:ext cx="4007612" cy="457200"/>
+            <a:off x="1874519" y="3930396"/>
+            <a:ext cx="3474215" cy="457200"/>
           </a:xfrm>
           <a:prstGeom prst="rect">
             <a:avLst/>
@@ -8126,7 +8126,7 @@
         </p:spPr>
         <p:txBody>
           <a:bodyPr wrap="none" lIns="45720" rIns="45720" tIns="18288" bIns="18288" anchor="ctr">
-            <a:spAutoFit/>
+            <a:noAutofit/>
           </a:bodyPr>
           <a:lstStyle/>
           <a:p>
@@ -8145,7 +8145,7 @@
       </p:sp>
       <p:pic>
         <p:nvPicPr>
-          <p:cNvPr id="16" name="Picture 15" descr="c24fdd83adec105e.png"/>
+          <p:cNvPr id="16" name="Picture 15" descr="57c14efe46195709.png"/>
           <p:cNvPicPr>
             <a:picLocks noChangeAspect="1"/>
           </p:cNvPicPr>
@@ -8159,8 +8159,8 @@
         </p:blipFill>
         <p:spPr>
           <a:xfrm>
-            <a:off x="5744972" y="3706368"/>
-            <a:ext cx="292608" cy="426720"/>
+            <a:off x="5211575" y="3877056"/>
+            <a:ext cx="417576" cy="563880"/>
           </a:xfrm>
           <a:prstGeom prst="rect">
             <a:avLst/>
@@ -8432,7 +8432,7 @@
       </p:sp>
       <p:pic>
         <p:nvPicPr>
-          <p:cNvPr id="9" name="Picture 8" descr="da75ff8038d9e849.png"/>
+          <p:cNvPr id="9" name="Picture 8" descr="f69d270b84b83600.png"/>
           <p:cNvPicPr>
             <a:picLocks noChangeAspect="1"/>
           </p:cNvPicPr>
@@ -8446,8 +8446,8 @@
         </p:blipFill>
         <p:spPr>
           <a:xfrm>
-            <a:off x="5567172" y="2103120"/>
-            <a:ext cx="1027176" cy="615696"/>
+            <a:off x="5350764" y="2103120"/>
+            <a:ext cx="1459992" cy="822960"/>
           </a:xfrm>
           <a:prstGeom prst="rect">
             <a:avLst/>
@@ -8462,7 +8462,7 @@
         </p:nvSpPr>
         <p:spPr>
           <a:xfrm>
-            <a:off x="1828800" y="3038855"/>
+            <a:off x="1828800" y="3246119"/>
             <a:ext cx="8503920" cy="548640"/>
           </a:xfrm>
           <a:prstGeom prst="rect">
@@ -8825,7 +8825,7 @@
       </p:sp>
       <p:pic>
         <p:nvPicPr>
-          <p:cNvPr id="9" name="Picture 8" descr="0066caab4ea6ae61.png"/>
+          <p:cNvPr id="9" name="Picture 8" descr="854a4a598c652712.png"/>
           <p:cNvPicPr>
             <a:picLocks noChangeAspect="1"/>
           </p:cNvPicPr>
@@ -8839,8 +8839,8 @@
         </p:blipFill>
         <p:spPr>
           <a:xfrm>
-            <a:off x="5446775" y="2194560"/>
-            <a:ext cx="1267968" cy="612648"/>
+            <a:off x="5177028" y="2194560"/>
+            <a:ext cx="1807464" cy="826008"/>
           </a:xfrm>
           <a:prstGeom prst="rect">
             <a:avLst/>
@@ -9182,7 +9182,7 @@
       </p:sp>
       <p:pic>
         <p:nvPicPr>
-          <p:cNvPr id="9" name="Picture 8" descr="0066caab4ea6ae61.png"/>
+          <p:cNvPr id="9" name="Picture 8" descr="8bc77f296de0cf4b.png"/>
           <p:cNvPicPr>
             <a:picLocks noChangeAspect="1"/>
           </p:cNvPicPr>
@@ -9196,8 +9196,8 @@
         </p:blipFill>
         <p:spPr>
           <a:xfrm>
-            <a:off x="5446775" y="2103120"/>
-            <a:ext cx="1267968" cy="612648"/>
+            <a:off x="5178552" y="2103120"/>
+            <a:ext cx="1804416" cy="822960"/>
           </a:xfrm>
           <a:prstGeom prst="rect">
             <a:avLst/>
@@ -9212,7 +9212,7 @@
         </p:nvSpPr>
         <p:spPr>
           <a:xfrm>
-            <a:off x="1828800" y="3035807"/>
+            <a:off x="1828800" y="3246119"/>
             <a:ext cx="8503920" cy="548640"/>
           </a:xfrm>
           <a:prstGeom prst="rect">
@@ -9671,7 +9671,7 @@
                 </a:solidFill>
                 <a:latin typeface="Century Schoolbook"/>
               </a:rPr>
-              <a:t>9</a:t>
+              <a:t>-1</a:t>
             </a:r>
           </a:p>
         </p:txBody>
@@ -9768,7 +9768,7 @@
                 </a:solidFill>
                 <a:latin typeface="Century Schoolbook"/>
               </a:rPr>
-              <a:t>5 × 10</a:t>
+              <a:t>6 × 10</a:t>
             </a:r>
             <a:r>
               <a:rPr sz="2400" b="0" i="0" baseline="30000">
@@ -9821,7 +9821,7 @@
                 </a:solidFill>
                 <a:latin typeface="Century Schoolbook"/>
               </a:rPr>
-              <a:t>6 × 10</a:t>
+              <a:t>5 × 10</a:t>
             </a:r>
             <a:r>
               <a:rPr sz="2400" b="0" i="0" baseline="30000">
@@ -9830,7 +9830,7 @@
                 </a:solidFill>
                 <a:latin typeface="Century Schoolbook"/>
               </a:rPr>
-              <a:t>-1</a:t>
+              <a:t>9</a:t>
             </a:r>
           </a:p>
         </p:txBody>
@@ -10135,7 +10135,7 @@
       </p:sp>
       <p:pic>
         <p:nvPicPr>
-          <p:cNvPr id="9" name="Picture 8" descr="c0f8266fbc7965d4.png"/>
+          <p:cNvPr id="9" name="Picture 8" descr="64c6147c2ce0e22d.png"/>
           <p:cNvPicPr>
             <a:picLocks noChangeAspect="1"/>
           </p:cNvPicPr>
@@ -10149,8 +10149,8 @@
         </p:blipFill>
         <p:spPr>
           <a:xfrm>
-            <a:off x="4675632" y="2103120"/>
-            <a:ext cx="2810256" cy="414528"/>
+            <a:off x="4674108" y="2103120"/>
+            <a:ext cx="2813304" cy="411480"/>
           </a:xfrm>
           <a:prstGeom prst="rect">
             <a:avLst/>
@@ -10165,7 +10165,7 @@
         </p:nvSpPr>
         <p:spPr>
           <a:xfrm>
-            <a:off x="777240" y="2791967"/>
+            <a:off x="777240" y="2788920"/>
             <a:ext cx="10607040" cy="465151"/>
           </a:xfrm>
           <a:prstGeom prst="rect">
@@ -10200,7 +10200,7 @@
         </p:nvSpPr>
         <p:spPr>
           <a:xfrm>
-            <a:off x="1874519" y="3458287"/>
+            <a:off x="1874519" y="3455239"/>
             <a:ext cx="4572000" cy="548640"/>
           </a:xfrm>
           <a:prstGeom prst="rect">
@@ -10218,11 +10218,117 @@
             <a:r>
               <a:rPr sz="2400" b="1" i="0">
                 <a:solidFill>
+                  <a:srgbClr val="1A1A1A"/>
+                </a:solidFill>
+                <a:latin typeface="Century Schoolbook"/>
+              </a:rPr>
+              <a:t>A.   </a:t>
+            </a:r>
+            <a:r>
+              <a:rPr sz="2400" b="0" i="0">
+                <a:solidFill>
+                  <a:srgbClr val="1A1A1A"/>
+                </a:solidFill>
+                <a:latin typeface="Century Schoolbook"/>
+              </a:rPr>
+              <a:t>6 × 10</a:t>
+            </a:r>
+            <a:r>
+              <a:rPr sz="2400" b="0" i="0" baseline="30000">
+                <a:solidFill>
+                  <a:srgbClr val="1A1A1A"/>
+                </a:solidFill>
+                <a:latin typeface="Century Schoolbook"/>
+              </a:rPr>
+              <a:t>-1</a:t>
+            </a:r>
+          </a:p>
+        </p:txBody>
+      </p:sp>
+      <p:sp>
+        <p:nvSpPr>
+          <p:cNvPr id="12" name="TextBox 11"/>
+          <p:cNvSpPr txBox="1"/>
+          <p:nvPr/>
+        </p:nvSpPr>
+        <p:spPr>
+          <a:xfrm>
+            <a:off x="6629400" y="3455239"/>
+            <a:ext cx="4572000" cy="548640"/>
+          </a:xfrm>
+          <a:prstGeom prst="rect">
+            <a:avLst/>
+          </a:prstGeom>
+          <a:noFill/>
+        </p:spPr>
+        <p:txBody>
+          <a:bodyPr wrap="square" lIns="45720" rIns="45720" tIns="18288" bIns="18288" anchor="t">
+            <a:spAutoFit/>
+          </a:bodyPr>
+          <a:lstStyle/>
+          <a:p>
+            <a:pPr algn="l"/>
+            <a:r>
+              <a:rPr sz="2400" b="1" i="0">
+                <a:solidFill>
+                  <a:srgbClr val="1A1A1A"/>
+                </a:solidFill>
+                <a:latin typeface="Century Schoolbook"/>
+              </a:rPr>
+              <a:t>B.   </a:t>
+            </a:r>
+            <a:r>
+              <a:rPr sz="2400" b="0" i="0">
+                <a:solidFill>
+                  <a:srgbClr val="1A1A1A"/>
+                </a:solidFill>
+                <a:latin typeface="Century Schoolbook"/>
+              </a:rPr>
+              <a:t>6 × 10</a:t>
+            </a:r>
+            <a:r>
+              <a:rPr sz="2400" b="0" i="0" baseline="30000">
+                <a:solidFill>
+                  <a:srgbClr val="1A1A1A"/>
+                </a:solidFill>
+                <a:latin typeface="Century Schoolbook"/>
+              </a:rPr>
+              <a:t>20</a:t>
+            </a:r>
+          </a:p>
+        </p:txBody>
+      </p:sp>
+      <p:sp>
+        <p:nvSpPr>
+          <p:cNvPr id="13" name="TextBox 12"/>
+          <p:cNvSpPr txBox="1"/>
+          <p:nvPr/>
+        </p:nvSpPr>
+        <p:spPr>
+          <a:xfrm>
+            <a:off x="1874519" y="4141039"/>
+            <a:ext cx="4572000" cy="548640"/>
+          </a:xfrm>
+          <a:prstGeom prst="rect">
+            <a:avLst/>
+          </a:prstGeom>
+          <a:noFill/>
+        </p:spPr>
+        <p:txBody>
+          <a:bodyPr wrap="square" lIns="45720" rIns="45720" tIns="18288" bIns="18288" anchor="t">
+            <a:spAutoFit/>
+          </a:bodyPr>
+          <a:lstStyle/>
+          <a:p>
+            <a:pPr algn="l"/>
+            <a:r>
+              <a:rPr sz="2400" b="1" i="0">
+                <a:solidFill>
                   <a:srgbClr val="9E1B32"/>
                 </a:solidFill>
                 <a:latin typeface="Century Schoolbook"/>
               </a:rPr>
-              <a:t>A.   </a:t>
+              <a:t>C.   </a:t>
             </a:r>
             <a:r>
               <a:rPr sz="2400" b="1" i="0">
@@ -10247,13 +10353,13 @@
       </p:sp>
       <p:sp>
         <p:nvSpPr>
-          <p:cNvPr id="12" name="TextBox 11"/>
-          <p:cNvSpPr txBox="1"/>
-          <p:nvPr/>
-        </p:nvSpPr>
-        <p:spPr>
-          <a:xfrm>
-            <a:off x="6629400" y="3458287"/>
+          <p:cNvPr id="14" name="TextBox 13"/>
+          <p:cNvSpPr txBox="1"/>
+          <p:nvPr/>
+        </p:nvSpPr>
+        <p:spPr>
+          <a:xfrm>
+            <a:off x="6629400" y="4141039"/>
             <a:ext cx="4572000" cy="548640"/>
           </a:xfrm>
           <a:prstGeom prst="rect">
@@ -10275,7 +10381,7 @@
                 </a:solidFill>
                 <a:latin typeface="Century Schoolbook"/>
               </a:rPr>
-              <a:t>B.   </a:t>
+              <a:t>D.   </a:t>
             </a:r>
             <a:r>
               <a:rPr sz="2400" b="0" i="0">
@@ -10284,7 +10390,7 @@
                 </a:solidFill>
                 <a:latin typeface="Century Schoolbook"/>
               </a:rPr>
-              <a:t>6 × 10</a:t>
+              <a:t>5 × 10</a:t>
             </a:r>
             <a:r>
               <a:rPr sz="2400" b="0" i="0" baseline="30000">
@@ -10293,59 +10399,6 @@
                 </a:solidFill>
                 <a:latin typeface="Century Schoolbook"/>
               </a:rPr>
-              <a:t>20</a:t>
-            </a:r>
-          </a:p>
-        </p:txBody>
-      </p:sp>
-      <p:sp>
-        <p:nvSpPr>
-          <p:cNvPr id="13" name="TextBox 12"/>
-          <p:cNvSpPr txBox="1"/>
-          <p:nvPr/>
-        </p:nvSpPr>
-        <p:spPr>
-          <a:xfrm>
-            <a:off x="1874519" y="4144087"/>
-            <a:ext cx="4572000" cy="548640"/>
-          </a:xfrm>
-          <a:prstGeom prst="rect">
-            <a:avLst/>
-          </a:prstGeom>
-          <a:noFill/>
-        </p:spPr>
-        <p:txBody>
-          <a:bodyPr wrap="square" lIns="45720" rIns="45720" tIns="18288" bIns="18288" anchor="t">
-            <a:spAutoFit/>
-          </a:bodyPr>
-          <a:lstStyle/>
-          <a:p>
-            <a:pPr algn="l"/>
-            <a:r>
-              <a:rPr sz="2400" b="1" i="0">
-                <a:solidFill>
-                  <a:srgbClr val="1A1A1A"/>
-                </a:solidFill>
-                <a:latin typeface="Century Schoolbook"/>
-              </a:rPr>
-              <a:t>C.   </a:t>
-            </a:r>
-            <a:r>
-              <a:rPr sz="2400" b="0" i="0">
-                <a:solidFill>
-                  <a:srgbClr val="1A1A1A"/>
-                </a:solidFill>
-                <a:latin typeface="Century Schoolbook"/>
-              </a:rPr>
-              <a:t>5 × 10</a:t>
-            </a:r>
-            <a:r>
-              <a:rPr sz="2400" b="0" i="0" baseline="30000">
-                <a:solidFill>
-                  <a:srgbClr val="1A1A1A"/>
-                </a:solidFill>
-                <a:latin typeface="Century Schoolbook"/>
-              </a:rPr>
               <a:t>9</a:t>
             </a:r>
           </a:p>
@@ -10353,66 +10406,13 @@
       </p:sp>
       <p:sp>
         <p:nvSpPr>
-          <p:cNvPr id="14" name="TextBox 13"/>
-          <p:cNvSpPr txBox="1"/>
-          <p:nvPr/>
-        </p:nvSpPr>
-        <p:spPr>
-          <a:xfrm>
-            <a:off x="6629400" y="4144087"/>
-            <a:ext cx="4572000" cy="548640"/>
-          </a:xfrm>
-          <a:prstGeom prst="rect">
-            <a:avLst/>
-          </a:prstGeom>
-          <a:noFill/>
-        </p:spPr>
-        <p:txBody>
-          <a:bodyPr wrap="square" lIns="45720" rIns="45720" tIns="18288" bIns="18288" anchor="t">
-            <a:spAutoFit/>
-          </a:bodyPr>
-          <a:lstStyle/>
-          <a:p>
-            <a:pPr algn="l"/>
-            <a:r>
-              <a:rPr sz="2400" b="1" i="0">
-                <a:solidFill>
-                  <a:srgbClr val="1A1A1A"/>
-                </a:solidFill>
-                <a:latin typeface="Century Schoolbook"/>
-              </a:rPr>
-              <a:t>D.   </a:t>
-            </a:r>
-            <a:r>
-              <a:rPr sz="2400" b="0" i="0">
-                <a:solidFill>
-                  <a:srgbClr val="1A1A1A"/>
-                </a:solidFill>
-                <a:latin typeface="Century Schoolbook"/>
-              </a:rPr>
-              <a:t>6 × 10</a:t>
-            </a:r>
-            <a:r>
-              <a:rPr sz="2400" b="0" i="0" baseline="30000">
-                <a:solidFill>
-                  <a:srgbClr val="1A1A1A"/>
-                </a:solidFill>
-                <a:latin typeface="Century Schoolbook"/>
-              </a:rPr>
-              <a:t>-1</a:t>
-            </a:r>
-          </a:p>
-        </p:txBody>
-      </p:sp>
-      <p:sp>
-        <p:nvSpPr>
           <p:cNvPr id="15" name="TextBox 14"/>
           <p:cNvSpPr txBox="1"/>
           <p:nvPr/>
         </p:nvSpPr>
         <p:spPr>
           <a:xfrm>
-            <a:off x="777240" y="5149927"/>
+            <a:off x="777240" y="5146879"/>
             <a:ext cx="10607040" cy="548640"/>
           </a:xfrm>
           <a:prstGeom prst="rect">
@@ -10434,7 +10434,7 @@
                 </a:solidFill>
                 <a:latin typeface="Century Schoolbook"/>
               </a:rPr>
-              <a:t>Answer:   A — 6 × 10</a:t>
+              <a:t>Answer:   C — 6 × 10</a:t>
             </a:r>
             <a:r>
               <a:rPr sz="3200" b="1" i="0" baseline="30000">
@@ -10818,7 +10818,7 @@
                 </a:solidFill>
                 <a:latin typeface="Century Schoolbook"/>
               </a:rPr>
-              <a:t>10</a:t>
+              <a:t>9</a:t>
             </a:r>
           </a:p>
         </p:txBody>
@@ -10915,7 +10915,7 @@
                 </a:solidFill>
                 <a:latin typeface="Century Schoolbook"/>
               </a:rPr>
-              <a:t>2 × 10</a:t>
+              <a:t>20 × 10</a:t>
             </a:r>
             <a:r>
               <a:rPr sz="2400" b="0" i="0" baseline="30000">
@@ -10924,7 +10924,7 @@
                 </a:solidFill>
                 <a:latin typeface="Century Schoolbook"/>
               </a:rPr>
-              <a:t>9</a:t>
+              <a:t>18</a:t>
             </a:r>
           </a:p>
         </p:txBody>
@@ -10968,7 +10968,7 @@
                 </a:solidFill>
                 <a:latin typeface="Century Schoolbook"/>
               </a:rPr>
-              <a:t>20 × 10</a:t>
+              <a:t>2 × 10</a:t>
             </a:r>
             <a:r>
               <a:rPr sz="2400" b="0" i="0" baseline="30000">
@@ -10977,7 +10977,7 @@
                 </a:solidFill>
                 <a:latin typeface="Century Schoolbook"/>
               </a:rPr>
-              <a:t>18</a:t>
+              <a:t>10</a:t>
             </a:r>
           </a:p>
         </p:txBody>
@@ -11282,7 +11282,7 @@
       </p:sp>
       <p:pic>
         <p:nvPicPr>
-          <p:cNvPr id="9" name="Picture 8" descr="f125fe26b9d135b4.png"/>
+          <p:cNvPr id="9" name="Picture 8" descr="ffd33f95921b2446.png"/>
           <p:cNvPicPr>
             <a:picLocks noChangeAspect="1"/>
           </p:cNvPicPr>
@@ -11296,8 +11296,8 @@
         </p:blipFill>
         <p:spPr>
           <a:xfrm>
-            <a:off x="4675632" y="2103120"/>
-            <a:ext cx="2810256" cy="414528"/>
+            <a:off x="4674108" y="2103120"/>
+            <a:ext cx="2813304" cy="411480"/>
           </a:xfrm>
           <a:prstGeom prst="rect">
             <a:avLst/>
@@ -11312,7 +11312,7 @@
         </p:nvSpPr>
         <p:spPr>
           <a:xfrm>
-            <a:off x="777240" y="2791967"/>
+            <a:off x="777240" y="2788920"/>
             <a:ext cx="10607040" cy="465151"/>
           </a:xfrm>
           <a:prstGeom prst="rect">
@@ -11347,7 +11347,7 @@
         </p:nvSpPr>
         <p:spPr>
           <a:xfrm>
-            <a:off x="1874519" y="3458287"/>
+            <a:off x="1874519" y="3455239"/>
             <a:ext cx="4572000" cy="548640"/>
           </a:xfrm>
           <a:prstGeom prst="rect">
@@ -11365,11 +11365,170 @@
             <a:r>
               <a:rPr sz="2400" b="1" i="0">
                 <a:solidFill>
+                  <a:srgbClr val="1A1A1A"/>
+                </a:solidFill>
+                <a:latin typeface="Century Schoolbook"/>
+              </a:rPr>
+              <a:t>A.   </a:t>
+            </a:r>
+            <a:r>
+              <a:rPr sz="2400" b="0" i="0">
+                <a:solidFill>
+                  <a:srgbClr val="1A1A1A"/>
+                </a:solidFill>
+                <a:latin typeface="Century Schoolbook"/>
+              </a:rPr>
+              <a:t>2 × 10</a:t>
+            </a:r>
+            <a:r>
+              <a:rPr sz="2400" b="0" i="0" baseline="30000">
+                <a:solidFill>
+                  <a:srgbClr val="1A1A1A"/>
+                </a:solidFill>
+                <a:latin typeface="Century Schoolbook"/>
+              </a:rPr>
+              <a:t>9</a:t>
+            </a:r>
+          </a:p>
+        </p:txBody>
+      </p:sp>
+      <p:sp>
+        <p:nvSpPr>
+          <p:cNvPr id="12" name="TextBox 11"/>
+          <p:cNvSpPr txBox="1"/>
+          <p:nvPr/>
+        </p:nvSpPr>
+        <p:spPr>
+          <a:xfrm>
+            <a:off x="6629400" y="3455239"/>
+            <a:ext cx="4572000" cy="548640"/>
+          </a:xfrm>
+          <a:prstGeom prst="rect">
+            <a:avLst/>
+          </a:prstGeom>
+          <a:noFill/>
+        </p:spPr>
+        <p:txBody>
+          <a:bodyPr wrap="square" lIns="45720" rIns="45720" tIns="18288" bIns="18288" anchor="t">
+            <a:spAutoFit/>
+          </a:bodyPr>
+          <a:lstStyle/>
+          <a:p>
+            <a:pPr algn="l"/>
+            <a:r>
+              <a:rPr sz="2400" b="1" i="0">
+                <a:solidFill>
+                  <a:srgbClr val="1A1A1A"/>
+                </a:solidFill>
+                <a:latin typeface="Century Schoolbook"/>
+              </a:rPr>
+              <a:t>B.   </a:t>
+            </a:r>
+            <a:r>
+              <a:rPr sz="2400" b="0" i="0">
+                <a:solidFill>
+                  <a:srgbClr val="1A1A1A"/>
+                </a:solidFill>
+                <a:latin typeface="Century Schoolbook"/>
+              </a:rPr>
+              <a:t>20 × 10</a:t>
+            </a:r>
+            <a:r>
+              <a:rPr sz="2400" b="0" i="0" baseline="30000">
+                <a:solidFill>
+                  <a:srgbClr val="1A1A1A"/>
+                </a:solidFill>
+                <a:latin typeface="Century Schoolbook"/>
+              </a:rPr>
+              <a:t>9</a:t>
+            </a:r>
+          </a:p>
+        </p:txBody>
+      </p:sp>
+      <p:sp>
+        <p:nvSpPr>
+          <p:cNvPr id="13" name="TextBox 12"/>
+          <p:cNvSpPr txBox="1"/>
+          <p:nvPr/>
+        </p:nvSpPr>
+        <p:spPr>
+          <a:xfrm>
+            <a:off x="1874519" y="4141039"/>
+            <a:ext cx="4572000" cy="548640"/>
+          </a:xfrm>
+          <a:prstGeom prst="rect">
+            <a:avLst/>
+          </a:prstGeom>
+          <a:noFill/>
+        </p:spPr>
+        <p:txBody>
+          <a:bodyPr wrap="square" lIns="45720" rIns="45720" tIns="18288" bIns="18288" anchor="t">
+            <a:spAutoFit/>
+          </a:bodyPr>
+          <a:lstStyle/>
+          <a:p>
+            <a:pPr algn="l"/>
+            <a:r>
+              <a:rPr sz="2400" b="1" i="0">
+                <a:solidFill>
+                  <a:srgbClr val="1A1A1A"/>
+                </a:solidFill>
+                <a:latin typeface="Century Schoolbook"/>
+              </a:rPr>
+              <a:t>C.   </a:t>
+            </a:r>
+            <a:r>
+              <a:rPr sz="2400" b="0" i="0">
+                <a:solidFill>
+                  <a:srgbClr val="1A1A1A"/>
+                </a:solidFill>
+                <a:latin typeface="Century Schoolbook"/>
+              </a:rPr>
+              <a:t>20 × 10</a:t>
+            </a:r>
+            <a:r>
+              <a:rPr sz="2400" b="0" i="0" baseline="30000">
+                <a:solidFill>
+                  <a:srgbClr val="1A1A1A"/>
+                </a:solidFill>
+                <a:latin typeface="Century Schoolbook"/>
+              </a:rPr>
+              <a:t>18</a:t>
+            </a:r>
+          </a:p>
+        </p:txBody>
+      </p:sp>
+      <p:sp>
+        <p:nvSpPr>
+          <p:cNvPr id="14" name="TextBox 13"/>
+          <p:cNvSpPr txBox="1"/>
+          <p:nvPr/>
+        </p:nvSpPr>
+        <p:spPr>
+          <a:xfrm>
+            <a:off x="6629400" y="4141039"/>
+            <a:ext cx="4572000" cy="548640"/>
+          </a:xfrm>
+          <a:prstGeom prst="rect">
+            <a:avLst/>
+          </a:prstGeom>
+          <a:noFill/>
+        </p:spPr>
+        <p:txBody>
+          <a:bodyPr wrap="square" lIns="45720" rIns="45720" tIns="18288" bIns="18288" anchor="t">
+            <a:spAutoFit/>
+          </a:bodyPr>
+          <a:lstStyle/>
+          <a:p>
+            <a:pPr algn="l"/>
+            <a:r>
+              <a:rPr sz="2400" b="1" i="0">
+                <a:solidFill>
                   <a:srgbClr val="9E1B32"/>
                 </a:solidFill>
                 <a:latin typeface="Century Schoolbook"/>
               </a:rPr>
-              <a:t>A.   </a:t>
+              <a:t>D.   </a:t>
             </a:r>
             <a:r>
               <a:rPr sz="2400" b="1" i="0">
@@ -11394,172 +11553,13 @@
       </p:sp>
       <p:sp>
         <p:nvSpPr>
-          <p:cNvPr id="12" name="TextBox 11"/>
-          <p:cNvSpPr txBox="1"/>
-          <p:nvPr/>
-        </p:nvSpPr>
-        <p:spPr>
-          <a:xfrm>
-            <a:off x="6629400" y="3458287"/>
-            <a:ext cx="4572000" cy="548640"/>
-          </a:xfrm>
-          <a:prstGeom prst="rect">
-            <a:avLst/>
-          </a:prstGeom>
-          <a:noFill/>
-        </p:spPr>
-        <p:txBody>
-          <a:bodyPr wrap="square" lIns="45720" rIns="45720" tIns="18288" bIns="18288" anchor="t">
-            <a:spAutoFit/>
-          </a:bodyPr>
-          <a:lstStyle/>
-          <a:p>
-            <a:pPr algn="l"/>
-            <a:r>
-              <a:rPr sz="2400" b="1" i="0">
-                <a:solidFill>
-                  <a:srgbClr val="1A1A1A"/>
-                </a:solidFill>
-                <a:latin typeface="Century Schoolbook"/>
-              </a:rPr>
-              <a:t>B.   </a:t>
-            </a:r>
-            <a:r>
-              <a:rPr sz="2400" b="0" i="0">
-                <a:solidFill>
-                  <a:srgbClr val="1A1A1A"/>
-                </a:solidFill>
-                <a:latin typeface="Century Schoolbook"/>
-              </a:rPr>
-              <a:t>20 × 10</a:t>
-            </a:r>
-            <a:r>
-              <a:rPr sz="2400" b="0" i="0" baseline="30000">
-                <a:solidFill>
-                  <a:srgbClr val="1A1A1A"/>
-                </a:solidFill>
-                <a:latin typeface="Century Schoolbook"/>
-              </a:rPr>
-              <a:t>9</a:t>
-            </a:r>
-          </a:p>
-        </p:txBody>
-      </p:sp>
-      <p:sp>
-        <p:nvSpPr>
-          <p:cNvPr id="13" name="TextBox 12"/>
-          <p:cNvSpPr txBox="1"/>
-          <p:nvPr/>
-        </p:nvSpPr>
-        <p:spPr>
-          <a:xfrm>
-            <a:off x="1874519" y="4144087"/>
-            <a:ext cx="4572000" cy="548640"/>
-          </a:xfrm>
-          <a:prstGeom prst="rect">
-            <a:avLst/>
-          </a:prstGeom>
-          <a:noFill/>
-        </p:spPr>
-        <p:txBody>
-          <a:bodyPr wrap="square" lIns="45720" rIns="45720" tIns="18288" bIns="18288" anchor="t">
-            <a:spAutoFit/>
-          </a:bodyPr>
-          <a:lstStyle/>
-          <a:p>
-            <a:pPr algn="l"/>
-            <a:r>
-              <a:rPr sz="2400" b="1" i="0">
-                <a:solidFill>
-                  <a:srgbClr val="1A1A1A"/>
-                </a:solidFill>
-                <a:latin typeface="Century Schoolbook"/>
-              </a:rPr>
-              <a:t>C.   </a:t>
-            </a:r>
-            <a:r>
-              <a:rPr sz="2400" b="0" i="0">
-                <a:solidFill>
-                  <a:srgbClr val="1A1A1A"/>
-                </a:solidFill>
-                <a:latin typeface="Century Schoolbook"/>
-              </a:rPr>
-              <a:t>2 × 10</a:t>
-            </a:r>
-            <a:r>
-              <a:rPr sz="2400" b="0" i="0" baseline="30000">
-                <a:solidFill>
-                  <a:srgbClr val="1A1A1A"/>
-                </a:solidFill>
-                <a:latin typeface="Century Schoolbook"/>
-              </a:rPr>
-              <a:t>9</a:t>
-            </a:r>
-          </a:p>
-        </p:txBody>
-      </p:sp>
-      <p:sp>
-        <p:nvSpPr>
-          <p:cNvPr id="14" name="TextBox 13"/>
-          <p:cNvSpPr txBox="1"/>
-          <p:nvPr/>
-        </p:nvSpPr>
-        <p:spPr>
-          <a:xfrm>
-            <a:off x="6629400" y="4144087"/>
-            <a:ext cx="4572000" cy="548640"/>
-          </a:xfrm>
-          <a:prstGeom prst="rect">
-            <a:avLst/>
-          </a:prstGeom>
-          <a:noFill/>
-        </p:spPr>
-        <p:txBody>
-          <a:bodyPr wrap="square" lIns="45720" rIns="45720" tIns="18288" bIns="18288" anchor="t">
-            <a:spAutoFit/>
-          </a:bodyPr>
-          <a:lstStyle/>
-          <a:p>
-            <a:pPr algn="l"/>
-            <a:r>
-              <a:rPr sz="2400" b="1" i="0">
-                <a:solidFill>
-                  <a:srgbClr val="1A1A1A"/>
-                </a:solidFill>
-                <a:latin typeface="Century Schoolbook"/>
-              </a:rPr>
-              <a:t>D.   </a:t>
-            </a:r>
-            <a:r>
-              <a:rPr sz="2400" b="0" i="0">
-                <a:solidFill>
-                  <a:srgbClr val="1A1A1A"/>
-                </a:solidFill>
-                <a:latin typeface="Century Schoolbook"/>
-              </a:rPr>
-              <a:t>20 × 10</a:t>
-            </a:r>
-            <a:r>
-              <a:rPr sz="2400" b="0" i="0" baseline="30000">
-                <a:solidFill>
-                  <a:srgbClr val="1A1A1A"/>
-                </a:solidFill>
-                <a:latin typeface="Century Schoolbook"/>
-              </a:rPr>
-              <a:t>18</a:t>
-            </a:r>
-          </a:p>
-        </p:txBody>
-      </p:sp>
-      <p:sp>
-        <p:nvSpPr>
           <p:cNvPr id="15" name="TextBox 14"/>
           <p:cNvSpPr txBox="1"/>
           <p:nvPr/>
         </p:nvSpPr>
         <p:spPr>
           <a:xfrm>
-            <a:off x="777240" y="5149927"/>
+            <a:off x="777240" y="5146879"/>
             <a:ext cx="10607040" cy="548640"/>
           </a:xfrm>
           <a:prstGeom prst="rect">
@@ -11581,7 +11581,7 @@
                 </a:solidFill>
                 <a:latin typeface="Century Schoolbook"/>
               </a:rPr>
-              <a:t>Answer:   A — 2 × 10</a:t>
+              <a:t>Answer:   D — 2 × 10</a:t>
             </a:r>
             <a:r>
               <a:rPr sz="3200" b="1" i="0" baseline="30000">
@@ -11860,7 +11860,7 @@
       </p:sp>
       <p:pic>
         <p:nvPicPr>
-          <p:cNvPr id="9" name="Picture 8" descr="ad0cae53a5fbafff.png"/>
+          <p:cNvPr id="9" name="Picture 8" descr="e525d712acf4b16c.png"/>
           <p:cNvPicPr>
             <a:picLocks noChangeAspect="1"/>
           </p:cNvPicPr>
@@ -11874,8 +11874,8 @@
         </p:blipFill>
         <p:spPr>
           <a:xfrm>
-            <a:off x="5606795" y="2194560"/>
-            <a:ext cx="947928" cy="615696"/>
+            <a:off x="5404103" y="2194560"/>
+            <a:ext cx="1353312" cy="826008"/>
           </a:xfrm>
           <a:prstGeom prst="rect">
             <a:avLst/>
@@ -12217,7 +12217,7 @@
       </p:sp>
       <p:pic>
         <p:nvPicPr>
-          <p:cNvPr id="9" name="Picture 8" descr="ad0cae53a5fbafff.png"/>
+          <p:cNvPr id="9" name="Picture 8" descr="dd4e224a7fe9f3b4.png"/>
           <p:cNvPicPr>
             <a:picLocks noChangeAspect="1"/>
           </p:cNvPicPr>
@@ -12231,8 +12231,8 @@
         </p:blipFill>
         <p:spPr>
           <a:xfrm>
-            <a:off x="5606795" y="2103120"/>
-            <a:ext cx="947928" cy="615696"/>
+            <a:off x="5407152" y="2103120"/>
+            <a:ext cx="1347216" cy="822960"/>
           </a:xfrm>
           <a:prstGeom prst="rect">
             <a:avLst/>
@@ -12247,7 +12247,7 @@
         </p:nvSpPr>
         <p:spPr>
           <a:xfrm>
-            <a:off x="1828800" y="3038855"/>
+            <a:off x="1828800" y="3246119"/>
             <a:ext cx="8503920" cy="548640"/>
           </a:xfrm>
           <a:prstGeom prst="rect">
@@ -12583,7 +12583,7 @@
       </p:sp>
       <p:pic>
         <p:nvPicPr>
-          <p:cNvPr id="9" name="Picture 8" descr="544f8885cee71c1a.png"/>
+          <p:cNvPr id="9" name="Picture 8" descr="cf1acb8271e6df89.png"/>
           <p:cNvPicPr>
             <a:picLocks noChangeAspect="1"/>
           </p:cNvPicPr>
@@ -12597,8 +12597,8 @@
         </p:blipFill>
         <p:spPr>
           <a:xfrm>
-            <a:off x="4636007" y="2194560"/>
-            <a:ext cx="2889504" cy="609600"/>
+            <a:off x="4416551" y="2194560"/>
+            <a:ext cx="3328416" cy="819912"/>
           </a:xfrm>
           <a:prstGeom prst="rect">
             <a:avLst/>
@@ -12613,8 +12613,8 @@
         </p:nvSpPr>
         <p:spPr>
           <a:xfrm>
-            <a:off x="3937000" y="3055619"/>
-            <a:ext cx="3816096" cy="457200"/>
+            <a:off x="4117100" y="3265931"/>
+            <a:ext cx="3546626" cy="457200"/>
           </a:xfrm>
           <a:prstGeom prst="rect">
             <a:avLst/>
@@ -12623,7 +12623,7 @@
         </p:spPr>
         <p:txBody>
           <a:bodyPr wrap="none" lIns="45720" rIns="45720" tIns="18288" bIns="18288" anchor="ctr">
-            <a:spAutoFit/>
+            <a:noAutofit/>
           </a:bodyPr>
           <a:lstStyle/>
           <a:p>
@@ -12656,7 +12656,7 @@
         </p:blipFill>
         <p:spPr>
           <a:xfrm>
-            <a:off x="7615936" y="3192779"/>
+            <a:off x="7526567" y="3403091"/>
             <a:ext cx="192024" cy="182880"/>
           </a:xfrm>
           <a:prstGeom prst="rect">
@@ -12672,8 +12672,8 @@
         </p:nvSpPr>
         <p:spPr>
           <a:xfrm>
-            <a:off x="7807960" y="3055619"/>
-            <a:ext cx="553720" cy="457200"/>
+            <a:off x="7718591" y="3265931"/>
+            <a:ext cx="462987" cy="457200"/>
           </a:xfrm>
           <a:prstGeom prst="rect">
             <a:avLst/>
@@ -12682,7 +12682,7 @@
         </p:spPr>
         <p:txBody>
           <a:bodyPr wrap="none" lIns="45720" rIns="45720" tIns="18288" bIns="18288" anchor="ctr">
-            <a:spAutoFit/>
+            <a:noAutofit/>
           </a:bodyPr>
           <a:lstStyle/>
           <a:p>
@@ -13041,7 +13041,7 @@
         <p:spPr>
           <a:xfrm>
             <a:off x="1874519" y="1760220"/>
-            <a:ext cx="969771" cy="457200"/>
+            <a:ext cx="720605" cy="457200"/>
           </a:xfrm>
           <a:prstGeom prst="rect">
             <a:avLst/>
@@ -13050,7 +13050,7 @@
         </p:spPr>
         <p:txBody>
           <a:bodyPr wrap="none" lIns="45720" rIns="45720" tIns="18288" bIns="18288" anchor="ctr">
-            <a:spAutoFit/>
+            <a:noAutofit/>
           </a:bodyPr>
           <a:lstStyle/>
           <a:p>
@@ -13083,7 +13083,7 @@
         </p:blipFill>
         <p:spPr>
           <a:xfrm>
-            <a:off x="2707132" y="1821180"/>
+            <a:off x="2457965" y="1821180"/>
             <a:ext cx="3099816" cy="335280"/>
           </a:xfrm>
           <a:prstGeom prst="rect">
@@ -13099,8 +13099,8 @@
         </p:nvSpPr>
         <p:spPr>
           <a:xfrm>
-            <a:off x="6355587" y="1760220"/>
-            <a:ext cx="1735074" cy="457200"/>
+            <a:off x="6106421" y="1760220"/>
+            <a:ext cx="1459438" cy="457200"/>
           </a:xfrm>
           <a:prstGeom prst="rect">
             <a:avLst/>
@@ -13109,7 +13109,7 @@
         </p:spPr>
         <p:txBody>
           <a:bodyPr wrap="none" lIns="45720" rIns="45720" tIns="18288" bIns="18288" anchor="ctr">
-            <a:spAutoFit/>
+            <a:noAutofit/>
           </a:bodyPr>
           <a:lstStyle/>
           <a:p>
@@ -13143,8 +13143,8 @@
         </p:nvSpPr>
         <p:spPr>
           <a:xfrm>
-            <a:off x="1874519" y="2415540"/>
-            <a:ext cx="4159504" cy="457200"/>
+            <a:off x="1874519" y="2500884"/>
+            <a:ext cx="3704805" cy="457200"/>
           </a:xfrm>
           <a:prstGeom prst="rect">
             <a:avLst/>
@@ -13153,7 +13153,7 @@
         </p:spPr>
         <p:txBody>
           <a:bodyPr wrap="none" lIns="45720" rIns="45720" tIns="18288" bIns="18288" anchor="ctr">
-            <a:spAutoFit/>
+            <a:noAutofit/>
           </a:bodyPr>
           <a:lstStyle/>
           <a:p>
@@ -13172,7 +13172,7 @@
       </p:sp>
       <p:pic>
         <p:nvPicPr>
-          <p:cNvPr id="13" name="Picture 12" descr="c33197799160426b.png"/>
+          <p:cNvPr id="13" name="Picture 12" descr="911d175e68347695.png"/>
           <p:cNvPicPr>
             <a:picLocks noChangeAspect="1"/>
           </p:cNvPicPr>
@@ -13186,8 +13186,8 @@
         </p:blipFill>
         <p:spPr>
           <a:xfrm>
-            <a:off x="5896864" y="2395728"/>
-            <a:ext cx="329184" cy="496824"/>
+            <a:off x="5442165" y="2395728"/>
+            <a:ext cx="469392" cy="667512"/>
           </a:xfrm>
           <a:prstGeom prst="rect">
             <a:avLst/>
@@ -13202,8 +13202,8 @@
         </p:nvSpPr>
         <p:spPr>
           <a:xfrm>
-            <a:off x="6774688" y="2372868"/>
-            <a:ext cx="718566" cy="457200"/>
+            <a:off x="6460197" y="2372868"/>
+            <a:ext cx="652507" cy="457200"/>
           </a:xfrm>
           <a:prstGeom prst="rect">
             <a:avLst/>
@@ -13212,7 +13212,7 @@
         </p:spPr>
         <p:txBody>
           <a:bodyPr wrap="none" lIns="45720" rIns="45720" tIns="18288" bIns="18288" anchor="ctr">
-            <a:spAutoFit/>
+            <a:noAutofit/>
           </a:bodyPr>
           <a:lstStyle/>
           <a:p>
@@ -13246,8 +13246,8 @@
         </p:nvSpPr>
         <p:spPr>
           <a:xfrm>
-            <a:off x="1874519" y="3070860"/>
-            <a:ext cx="3551936" cy="457200"/>
+            <a:off x="1874519" y="3241548"/>
+            <a:ext cx="3064939" cy="457200"/>
           </a:xfrm>
           <a:prstGeom prst="rect">
             <a:avLst/>
@@ -13256,7 +13256,7 @@
         </p:spPr>
         <p:txBody>
           <a:bodyPr wrap="none" lIns="45720" rIns="45720" tIns="18288" bIns="18288" anchor="ctr">
-            <a:spAutoFit/>
+            <a:noAutofit/>
           </a:bodyPr>
           <a:lstStyle/>
           <a:p>
@@ -13289,7 +13289,7 @@
         </p:blipFill>
         <p:spPr>
           <a:xfrm>
-            <a:off x="5289296" y="3095244"/>
+            <a:off x="4802299" y="3265932"/>
             <a:ext cx="853440" cy="408432"/>
           </a:xfrm>
           <a:prstGeom prst="rect">
@@ -13305,8 +13305,8 @@
         </p:nvSpPr>
         <p:spPr>
           <a:xfrm>
-            <a:off x="6691376" y="3070860"/>
-            <a:ext cx="549148" cy="457200"/>
+            <a:off x="6204379" y="3241548"/>
+            <a:ext cx="565792" cy="457200"/>
           </a:xfrm>
           <a:prstGeom prst="rect">
             <a:avLst/>
@@ -13315,7 +13315,7 @@
         </p:spPr>
         <p:txBody>
           <a:bodyPr wrap="none" lIns="45720" rIns="45720" tIns="18288" bIns="18288" anchor="ctr">
-            <a:spAutoFit/>
+            <a:noAutofit/>
           </a:bodyPr>
           <a:lstStyle/>
           <a:p>
@@ -13340,8 +13340,8 @@
         </p:nvSpPr>
         <p:spPr>
           <a:xfrm>
-            <a:off x="1874519" y="3691128"/>
-            <a:ext cx="4007612" cy="457200"/>
+            <a:off x="1874519" y="3930396"/>
+            <a:ext cx="3474215" cy="457200"/>
           </a:xfrm>
           <a:prstGeom prst="rect">
             <a:avLst/>
@@ -13350,7 +13350,7 @@
         </p:spPr>
         <p:txBody>
           <a:bodyPr wrap="none" lIns="45720" rIns="45720" tIns="18288" bIns="18288" anchor="ctr">
-            <a:spAutoFit/>
+            <a:noAutofit/>
           </a:bodyPr>
           <a:lstStyle/>
           <a:p>
@@ -13369,7 +13369,7 @@
       </p:sp>
       <p:pic>
         <p:nvPicPr>
-          <p:cNvPr id="19" name="Picture 18" descr="c24fdd83adec105e.png"/>
+          <p:cNvPr id="19" name="Picture 18" descr="57c14efe46195709.png"/>
           <p:cNvPicPr>
             <a:picLocks noChangeAspect="1"/>
           </p:cNvPicPr>
@@ -13383,8 +13383,8 @@
         </p:blipFill>
         <p:spPr>
           <a:xfrm>
-            <a:off x="5744972" y="3706368"/>
-            <a:ext cx="292608" cy="426720"/>
+            <a:off x="5211575" y="3877056"/>
+            <a:ext cx="417576" cy="563880"/>
           </a:xfrm>
           <a:prstGeom prst="rect">
             <a:avLst/>
@@ -13399,8 +13399,8 @@
         </p:nvSpPr>
         <p:spPr>
           <a:xfrm>
-            <a:off x="6586220" y="3683508"/>
-            <a:ext cx="379729" cy="457200"/>
+            <a:off x="6177791" y="3854196"/>
+            <a:ext cx="388052" cy="457200"/>
           </a:xfrm>
           <a:prstGeom prst="rect">
             <a:avLst/>
@@ -13409,7 +13409,7 @@
         </p:spPr>
         <p:txBody>
           <a:bodyPr wrap="none" lIns="45720" rIns="45720" tIns="18288" bIns="18288" anchor="ctr">
-            <a:spAutoFit/>
+            <a:noAutofit/>
           </a:bodyPr>
           <a:lstStyle/>
           <a:p>
@@ -13691,7 +13691,7 @@
       </p:sp>
       <p:pic>
         <p:nvPicPr>
-          <p:cNvPr id="9" name="Picture 8" descr="544f8885cee71c1a.png"/>
+          <p:cNvPr id="9" name="Picture 8" descr="49829e386e3352b6.png"/>
           <p:cNvPicPr>
             <a:picLocks noChangeAspect="1"/>
           </p:cNvPicPr>
@@ -13705,8 +13705,8 @@
         </p:blipFill>
         <p:spPr>
           <a:xfrm>
-            <a:off x="4636007" y="2103120"/>
-            <a:ext cx="2889504" cy="609600"/>
+            <a:off x="4415028" y="2103120"/>
+            <a:ext cx="3331464" cy="816864"/>
           </a:xfrm>
           <a:prstGeom prst="rect">
             <a:avLst/>
@@ -13721,8 +13721,8 @@
         </p:nvSpPr>
         <p:spPr>
           <a:xfrm>
-            <a:off x="3937000" y="2964179"/>
-            <a:ext cx="3816096" cy="457200"/>
+            <a:off x="4117100" y="3171444"/>
+            <a:ext cx="3546626" cy="457200"/>
           </a:xfrm>
           <a:prstGeom prst="rect">
             <a:avLst/>
@@ -13731,7 +13731,7 @@
         </p:spPr>
         <p:txBody>
           <a:bodyPr wrap="none" lIns="45720" rIns="45720" tIns="18288" bIns="18288" anchor="ctr">
-            <a:spAutoFit/>
+            <a:noAutofit/>
           </a:bodyPr>
           <a:lstStyle/>
           <a:p>
@@ -13764,7 +13764,7 @@
         </p:blipFill>
         <p:spPr>
           <a:xfrm>
-            <a:off x="7615936" y="3101339"/>
+            <a:off x="7526567" y="3308604"/>
             <a:ext cx="192024" cy="182880"/>
           </a:xfrm>
           <a:prstGeom prst="rect">
@@ -13780,8 +13780,8 @@
         </p:nvSpPr>
         <p:spPr>
           <a:xfrm>
-            <a:off x="7807960" y="2964179"/>
-            <a:ext cx="553720" cy="457200"/>
+            <a:off x="7718591" y="3171444"/>
+            <a:ext cx="462987" cy="457200"/>
           </a:xfrm>
           <a:prstGeom prst="rect">
             <a:avLst/>
@@ -13790,7 +13790,7 @@
         </p:spPr>
         <p:txBody>
           <a:bodyPr wrap="none" lIns="45720" rIns="45720" tIns="18288" bIns="18288" anchor="ctr">
-            <a:spAutoFit/>
+            <a:noAutofit/>
           </a:bodyPr>
           <a:lstStyle/>
           <a:p>
@@ -13815,7 +13815,7 @@
         </p:nvSpPr>
         <p:spPr>
           <a:xfrm>
-            <a:off x="1828800" y="3718560"/>
+            <a:off x="1828800" y="3925823"/>
             <a:ext cx="8503920" cy="548640"/>
           </a:xfrm>
           <a:prstGeom prst="rect">
@@ -14148,8 +14148,8 @@
         </p:nvSpPr>
         <p:spPr>
           <a:xfrm>
-            <a:off x="2895092" y="2273807"/>
-            <a:ext cx="1068832" cy="457200"/>
+            <a:off x="2838140" y="2378964"/>
+            <a:ext cx="954771" cy="457200"/>
           </a:xfrm>
           <a:prstGeom prst="rect">
             <a:avLst/>
@@ -14158,7 +14158,7 @@
         </p:spPr>
         <p:txBody>
           <a:bodyPr wrap="none" lIns="45720" rIns="45720" tIns="18288" bIns="18288" anchor="ctr">
-            <a:spAutoFit/>
+            <a:noAutofit/>
           </a:bodyPr>
           <a:lstStyle/>
           <a:p>
@@ -14177,7 +14177,7 @@
       </p:sp>
       <p:pic>
         <p:nvPicPr>
-          <p:cNvPr id="10" name="Picture 9" descr="be067deea74d5ed6.png"/>
+          <p:cNvPr id="10" name="Picture 9" descr="497afcee60275d61.png"/>
           <p:cNvPicPr>
             <a:picLocks noChangeAspect="1"/>
           </p:cNvPicPr>
@@ -14191,8 +14191,8 @@
         </p:blipFill>
         <p:spPr>
           <a:xfrm>
-            <a:off x="3826763" y="2194560"/>
-            <a:ext cx="1027176" cy="615696"/>
+            <a:off x="3655751" y="2194560"/>
+            <a:ext cx="1463040" cy="826008"/>
           </a:xfrm>
           <a:prstGeom prst="rect">
             <a:avLst/>
@@ -14207,8 +14207,8 @@
         </p:nvSpPr>
         <p:spPr>
           <a:xfrm>
-            <a:off x="4853939" y="2273807"/>
-            <a:ext cx="3129280" cy="457200"/>
+            <a:off x="5118791" y="2378964"/>
+            <a:ext cx="2921380" cy="457200"/>
           </a:xfrm>
           <a:prstGeom prst="rect">
             <a:avLst/>
@@ -14217,7 +14217,7 @@
         </p:spPr>
         <p:txBody>
           <a:bodyPr wrap="none" lIns="45720" rIns="45720" tIns="18288" bIns="18288" anchor="ctr">
-            <a:spAutoFit/>
+            <a:noAutofit/>
           </a:bodyPr>
           <a:lstStyle/>
           <a:p>
@@ -14250,7 +14250,7 @@
         </p:blipFill>
         <p:spPr>
           <a:xfrm>
-            <a:off x="7846060" y="2325624"/>
+            <a:off x="7903011" y="2430780"/>
             <a:ext cx="1420368" cy="353568"/>
           </a:xfrm>
           <a:prstGeom prst="rect">
@@ -14266,8 +14266,8 @@
         </p:nvSpPr>
         <p:spPr>
           <a:xfrm>
-            <a:off x="3962908" y="3061716"/>
-            <a:ext cx="3129280" cy="457200"/>
+            <a:off x="4034964" y="3272028"/>
+            <a:ext cx="2985166" cy="457200"/>
           </a:xfrm>
           <a:prstGeom prst="rect">
             <a:avLst/>
@@ -14276,7 +14276,7 @@
         </p:spPr>
         <p:txBody>
           <a:bodyPr wrap="none" lIns="45720" rIns="45720" tIns="18288" bIns="18288" anchor="ctr">
-            <a:spAutoFit/>
+            <a:noAutofit/>
           </a:bodyPr>
           <a:lstStyle/>
           <a:p>
@@ -14309,7 +14309,7 @@
         </p:blipFill>
         <p:spPr>
           <a:xfrm>
-            <a:off x="6955028" y="3115055"/>
+            <a:off x="6882971" y="3325367"/>
             <a:ext cx="1243584" cy="350520"/>
           </a:xfrm>
           <a:prstGeom prst="rect">
@@ -14325,7 +14325,7 @@
         </p:nvSpPr>
         <p:spPr>
           <a:xfrm>
-            <a:off x="777240" y="3770375"/>
+            <a:off x="777240" y="3980687"/>
             <a:ext cx="10607040" cy="411480"/>
           </a:xfrm>
           <a:prstGeom prst="rect">
@@ -14360,7 +14360,7 @@
         </p:nvSpPr>
         <p:spPr>
           <a:xfrm>
-            <a:off x="777240" y="4428744"/>
+            <a:off x="777240" y="4639056"/>
             <a:ext cx="10607040" cy="457200"/>
           </a:xfrm>
           <a:prstGeom prst="rect">
@@ -14395,7 +14395,7 @@
         </p:nvSpPr>
         <p:spPr>
           <a:xfrm>
-            <a:off x="777240" y="4913376"/>
+            <a:off x="777240" y="5123688"/>
             <a:ext cx="10607040" cy="365760"/>
           </a:xfrm>
           <a:prstGeom prst="rect">
@@ -14693,8 +14693,8 @@
         </p:nvSpPr>
         <p:spPr>
           <a:xfrm>
-            <a:off x="2895092" y="2182368"/>
-            <a:ext cx="1068832" cy="457200"/>
+            <a:off x="2839664" y="2284475"/>
+            <a:ext cx="954771" cy="457200"/>
           </a:xfrm>
           <a:prstGeom prst="rect">
             <a:avLst/>
@@ -14703,7 +14703,7 @@
         </p:spPr>
         <p:txBody>
           <a:bodyPr wrap="none" lIns="45720" rIns="45720" tIns="18288" bIns="18288" anchor="ctr">
-            <a:spAutoFit/>
+            <a:noAutofit/>
           </a:bodyPr>
           <a:lstStyle/>
           <a:p>
@@ -14722,7 +14722,7 @@
       </p:sp>
       <p:pic>
         <p:nvPicPr>
-          <p:cNvPr id="10" name="Picture 9" descr="be067deea74d5ed6.png"/>
+          <p:cNvPr id="10" name="Picture 9" descr="11453e40830bd3a9.png"/>
           <p:cNvPicPr>
             <a:picLocks noChangeAspect="1"/>
           </p:cNvPicPr>
@@ -14736,8 +14736,8 @@
         </p:blipFill>
         <p:spPr>
           <a:xfrm>
-            <a:off x="3826763" y="2103120"/>
-            <a:ext cx="1027176" cy="615696"/>
+            <a:off x="3657275" y="2103120"/>
+            <a:ext cx="1459992" cy="819912"/>
           </a:xfrm>
           <a:prstGeom prst="rect">
             <a:avLst/>
@@ -14752,8 +14752,8 @@
         </p:nvSpPr>
         <p:spPr>
           <a:xfrm>
-            <a:off x="4853939" y="2182368"/>
-            <a:ext cx="3129280" cy="457200"/>
+            <a:off x="5117267" y="2284475"/>
+            <a:ext cx="2921380" cy="457200"/>
           </a:xfrm>
           <a:prstGeom prst="rect">
             <a:avLst/>
@@ -14762,7 +14762,7 @@
         </p:spPr>
         <p:txBody>
           <a:bodyPr wrap="none" lIns="45720" rIns="45720" tIns="18288" bIns="18288" anchor="ctr">
-            <a:spAutoFit/>
+            <a:noAutofit/>
           </a:bodyPr>
           <a:lstStyle/>
           <a:p>
@@ -14781,7 +14781,7 @@
       </p:sp>
       <p:pic>
         <p:nvPicPr>
-          <p:cNvPr id="12" name="Picture 11" descr="a61c108a2c4f32af.png"/>
+          <p:cNvPr id="12" name="Picture 11" descr="9220e587e37081e6.png"/>
           <p:cNvPicPr>
             <a:picLocks noChangeAspect="1"/>
           </p:cNvPicPr>
@@ -14795,7 +14795,7 @@
         </p:blipFill>
         <p:spPr>
           <a:xfrm>
-            <a:off x="7846060" y="2234184"/>
+            <a:off x="7901487" y="2336291"/>
             <a:ext cx="1420368" cy="353568"/>
           </a:xfrm>
           <a:prstGeom prst="rect">
@@ -14811,8 +14811,8 @@
         </p:nvSpPr>
         <p:spPr>
           <a:xfrm>
-            <a:off x="3962908" y="2970275"/>
-            <a:ext cx="3129280" cy="457200"/>
+            <a:off x="4033440" y="3174491"/>
+            <a:ext cx="2985166" cy="457200"/>
           </a:xfrm>
           <a:prstGeom prst="rect">
             <a:avLst/>
@@ -14821,7 +14821,7 @@
         </p:spPr>
         <p:txBody>
           <a:bodyPr wrap="none" lIns="45720" rIns="45720" tIns="18288" bIns="18288" anchor="ctr">
-            <a:spAutoFit/>
+            <a:noAutofit/>
           </a:bodyPr>
           <a:lstStyle/>
           <a:p>
@@ -14840,7 +14840,7 @@
       </p:sp>
       <p:pic>
         <p:nvPicPr>
-          <p:cNvPr id="14" name="Picture 13" descr="5029bb2e4362f29c.png"/>
+          <p:cNvPr id="14" name="Picture 13" descr="6afd167257bcd611.png"/>
           <p:cNvPicPr>
             <a:picLocks noChangeAspect="1"/>
           </p:cNvPicPr>
@@ -14854,8 +14854,8 @@
         </p:blipFill>
         <p:spPr>
           <a:xfrm>
-            <a:off x="6955028" y="3023615"/>
-            <a:ext cx="1243584" cy="350520"/>
+            <a:off x="6881447" y="3227831"/>
+            <a:ext cx="1246632" cy="350520"/>
           </a:xfrm>
           <a:prstGeom prst="rect">
             <a:avLst/>
@@ -14870,7 +14870,7 @@
         </p:nvSpPr>
         <p:spPr>
           <a:xfrm>
-            <a:off x="777240" y="3678936"/>
+            <a:off x="777240" y="3883151"/>
             <a:ext cx="10607040" cy="411480"/>
           </a:xfrm>
           <a:prstGeom prst="rect">
@@ -14905,7 +14905,7 @@
         </p:nvSpPr>
         <p:spPr>
           <a:xfrm>
-            <a:off x="1828800" y="4245864"/>
+            <a:off x="1828800" y="4450080"/>
             <a:ext cx="8503920" cy="548640"/>
           </a:xfrm>
           <a:prstGeom prst="rect">
@@ -14940,7 +14940,7 @@
         </p:nvSpPr>
         <p:spPr>
           <a:xfrm>
-            <a:off x="777240" y="4977384"/>
+            <a:off x="777240" y="5181600"/>
             <a:ext cx="10607040" cy="548640"/>
           </a:xfrm>
           <a:prstGeom prst="rect">
@@ -16362,7 +16362,7 @@
       </p:cxnSp>
       <p:pic>
         <p:nvPicPr>
-          <p:cNvPr id="11" name="Picture 10" descr="9c8d3ef4a52a092c.png"/>
+          <p:cNvPr id="11" name="Picture 10" descr="3d98347d24a5e79c.png"/>
           <p:cNvPicPr>
             <a:picLocks noChangeAspect="1"/>
           </p:cNvPicPr>
@@ -16376,8 +16376,8 @@
         </p:blipFill>
         <p:spPr>
           <a:xfrm>
-            <a:off x="2427732" y="2340864"/>
-            <a:ext cx="7306056" cy="414528"/>
+            <a:off x="2424683" y="2340864"/>
+            <a:ext cx="7312152" cy="411480"/>
           </a:xfrm>
           <a:prstGeom prst="rect">
             <a:avLst/>
@@ -16386,7 +16386,7 @@
       </p:pic>
       <p:pic>
         <p:nvPicPr>
-          <p:cNvPr id="12" name="Picture 11" descr="f5cada7c811cd680.png"/>
+          <p:cNvPr id="12" name="Picture 11" descr="cac393ebd07bcf14.png"/>
           <p:cNvPicPr>
             <a:picLocks noChangeAspect="1"/>
           </p:cNvPicPr>
@@ -16400,8 +16400,8 @@
         </p:blipFill>
         <p:spPr>
           <a:xfrm>
-            <a:off x="3656584" y="3061716"/>
-            <a:ext cx="1112520" cy="347472"/>
+            <a:off x="3971941" y="3058668"/>
+            <a:ext cx="1115568" cy="347472"/>
           </a:xfrm>
           <a:prstGeom prst="rect">
             <a:avLst/>
@@ -16416,8 +16416,8 @@
         </p:nvSpPr>
         <p:spPr>
           <a:xfrm>
-            <a:off x="4769104" y="3006852"/>
-            <a:ext cx="2614168" cy="457200"/>
+            <a:off x="5087509" y="3003804"/>
+            <a:ext cx="1977357" cy="457200"/>
           </a:xfrm>
           <a:prstGeom prst="rect">
             <a:avLst/>
@@ -16426,7 +16426,7 @@
         </p:spPr>
         <p:txBody>
           <a:bodyPr wrap="none" lIns="45720" rIns="45720" tIns="18288" bIns="18288" anchor="ctr">
-            <a:spAutoFit/>
+            <a:noAutofit/>
           </a:bodyPr>
           <a:lstStyle/>
           <a:p>
@@ -16445,7 +16445,7 @@
       </p:sp>
       <p:pic>
         <p:nvPicPr>
-          <p:cNvPr id="14" name="Picture 13" descr="6f5d93cbf6fe4ac2.png"/>
+          <p:cNvPr id="14" name="Picture 13" descr="d56fc73065e54a04.png"/>
           <p:cNvPicPr>
             <a:picLocks noChangeAspect="1"/>
           </p:cNvPicPr>
@@ -16459,8 +16459,8 @@
         </p:blipFill>
         <p:spPr>
           <a:xfrm>
-            <a:off x="7246112" y="3060191"/>
-            <a:ext cx="1258824" cy="350520"/>
+            <a:off x="6927706" y="3057144"/>
+            <a:ext cx="1261872" cy="350520"/>
           </a:xfrm>
           <a:prstGeom prst="rect">
             <a:avLst/>
@@ -16475,7 +16475,7 @@
         </p:nvSpPr>
         <p:spPr>
           <a:xfrm>
-            <a:off x="987552" y="3779520"/>
+            <a:off x="987552" y="3776472"/>
             <a:ext cx="10131551" cy="950976"/>
           </a:xfrm>
           <a:prstGeom prst="rect">
@@ -16802,7 +16802,7 @@
       </p:cxnSp>
       <p:pic>
         <p:nvPicPr>
-          <p:cNvPr id="10" name="Picture 9" descr="7fb989068a26ffdd.png"/>
+          <p:cNvPr id="10" name="Picture 9" descr="1a3a168722c51cc1.png"/>
           <p:cNvPicPr>
             <a:picLocks noChangeAspect="1"/>
           </p:cNvPicPr>
@@ -16816,8 +16816,8 @@
         </p:blipFill>
         <p:spPr>
           <a:xfrm>
-            <a:off x="3701795" y="2340864"/>
-            <a:ext cx="4757928" cy="615696"/>
+            <a:off x="3404616" y="2340864"/>
+            <a:ext cx="5352288" cy="819912"/>
           </a:xfrm>
           <a:prstGeom prst="rect">
             <a:avLst/>
@@ -16826,7 +16826,7 @@
       </p:pic>
       <p:pic>
         <p:nvPicPr>
-          <p:cNvPr id="11" name="Picture 10" descr="d744254e51d2736b.png"/>
+          <p:cNvPr id="11" name="Picture 10" descr="a2db9260e2659194.png"/>
           <p:cNvPicPr>
             <a:picLocks noChangeAspect="1"/>
           </p:cNvPicPr>
@@ -16840,8 +16840,8 @@
         </p:blipFill>
         <p:spPr>
           <a:xfrm>
-            <a:off x="3572256" y="3230880"/>
-            <a:ext cx="5017008" cy="615696"/>
+            <a:off x="3368040" y="3435095"/>
+            <a:ext cx="5425440" cy="822960"/>
           </a:xfrm>
           <a:prstGeom prst="rect">
             <a:avLst/>
@@ -16856,7 +16856,7 @@
         </p:nvSpPr>
         <p:spPr>
           <a:xfrm>
-            <a:off x="987552" y="4184904"/>
+            <a:off x="987552" y="4596384"/>
             <a:ext cx="10131551" cy="475488"/>
           </a:xfrm>
           <a:prstGeom prst="rect">
@@ -17183,7 +17183,7 @@
       </p:cxnSp>
       <p:pic>
         <p:nvPicPr>
-          <p:cNvPr id="10" name="Picture 9" descr="71a6fe4f15b96702.png"/>
+          <p:cNvPr id="10" name="Picture 9" descr="0c79c2afc3e4714d.png"/>
           <p:cNvPicPr>
             <a:picLocks noChangeAspect="1"/>
           </p:cNvPicPr>
@@ -17197,8 +17197,8 @@
         </p:blipFill>
         <p:spPr>
           <a:xfrm>
-            <a:off x="2878836" y="2340864"/>
-            <a:ext cx="6403848" cy="414528"/>
+            <a:off x="2875788" y="2340864"/>
+            <a:ext cx="6409944" cy="411480"/>
           </a:xfrm>
           <a:prstGeom prst="rect">
             <a:avLst/>
@@ -17207,7 +17207,7 @@
       </p:pic>
       <p:pic>
         <p:nvPicPr>
-          <p:cNvPr id="11" name="Picture 10" descr="79b677b72dcf6b5a.png"/>
+          <p:cNvPr id="11" name="Picture 10" descr="6e3a2fa74bbe542d.png"/>
           <p:cNvPicPr>
             <a:picLocks noChangeAspect="1"/>
           </p:cNvPicPr>
@@ -17221,8 +17221,8 @@
         </p:blipFill>
         <p:spPr>
           <a:xfrm>
-            <a:off x="3290316" y="3029711"/>
-            <a:ext cx="5580888" cy="612648"/>
+            <a:off x="3019044" y="3026664"/>
+            <a:ext cx="6123432" cy="822960"/>
           </a:xfrm>
           <a:prstGeom prst="rect">
             <a:avLst/>
@@ -17237,7 +17237,7 @@
         </p:nvSpPr>
         <p:spPr>
           <a:xfrm>
-            <a:off x="987552" y="3980688"/>
+            <a:off x="987552" y="4187952"/>
             <a:ext cx="10131551" cy="475488"/>
           </a:xfrm>
           <a:prstGeom prst="rect">
@@ -17851,7 +17851,7 @@
       </p:sp>
       <p:pic>
         <p:nvPicPr>
-          <p:cNvPr id="9" name="Picture 8" descr="d73d4fc817d41765.png"/>
+          <p:cNvPr id="9" name="Picture 8" descr="255f5ba7a254ef28.png"/>
           <p:cNvPicPr>
             <a:picLocks noChangeAspect="1"/>
           </p:cNvPicPr>
@@ -17866,7 +17866,7 @@
         <p:spPr>
           <a:xfrm>
             <a:off x="1828800" y="1920240"/>
-            <a:ext cx="6766560" cy="411480"/>
+            <a:ext cx="6769608" cy="408432"/>
           </a:xfrm>
           <a:prstGeom prst="rect">
             <a:avLst/>
@@ -17881,8 +17881,8 @@
         </p:nvSpPr>
         <p:spPr>
           <a:xfrm>
-            <a:off x="9052560" y="1897380"/>
-            <a:ext cx="2331719" cy="502920"/>
+            <a:off x="9055608" y="1895856"/>
+            <a:ext cx="2328672" cy="502920"/>
           </a:xfrm>
           <a:prstGeom prst="rect">
             <a:avLst/>
@@ -17910,7 +17910,7 @@
       </p:sp>
       <p:pic>
         <p:nvPicPr>
-          <p:cNvPr id="11" name="Picture 10" descr="2096190fe4936081.png"/>
+          <p:cNvPr id="11" name="Picture 10" descr="6f84424baa8324fb.png"/>
           <p:cNvPicPr>
             <a:picLocks noChangeAspect="1"/>
           </p:cNvPicPr>
@@ -17924,8 +17924,8 @@
         </p:blipFill>
         <p:spPr>
           <a:xfrm>
-            <a:off x="1828800" y="2606040"/>
-            <a:ext cx="1652016" cy="350520"/>
+            <a:off x="1828800" y="2602992"/>
+            <a:ext cx="1652016" cy="353568"/>
           </a:xfrm>
           <a:prstGeom prst="rect">
             <a:avLst/>
@@ -17940,7 +17940,7 @@
         </p:nvSpPr>
         <p:spPr>
           <a:xfrm>
-            <a:off x="3938016" y="2552700"/>
+            <a:off x="3938016" y="2551176"/>
             <a:ext cx="6400800" cy="502920"/>
           </a:xfrm>
           <a:prstGeom prst="rect">
@@ -17969,7 +17969,7 @@
       </p:sp>
       <p:pic>
         <p:nvPicPr>
-          <p:cNvPr id="13" name="Picture 12" descr="8041856825bc9836.png"/>
+          <p:cNvPr id="13" name="Picture 12" descr="faf479a8541eeb60.png"/>
           <p:cNvPicPr>
             <a:picLocks noChangeAspect="1"/>
           </p:cNvPicPr>

--- a/a7/build/out/u4/A7 4.02  Slides.pptx
+++ b/a7/build/out/u4/A7 4.02  Slides.pptx
@@ -6443,8 +6443,8 @@
         </p:nvSpPr>
         <p:spPr>
           <a:xfrm>
-            <a:off x="2669526" y="2171700"/>
-            <a:ext cx="3042590" cy="457200"/>
+            <a:off x="1234440" y="1851660"/>
+            <a:ext cx="2824727" cy="457200"/>
           </a:xfrm>
           <a:prstGeom prst="rect">
             <a:avLst/>
@@ -6459,7 +6459,7 @@
           <a:p>
             <a:pPr algn="l"/>
             <a:r>
-              <a:rPr sz="2600" b="0" i="0">
+              <a:rPr sz="2400" b="0" i="0">
                 <a:solidFill>
                   <a:srgbClr val="1A1A1A"/>
                 </a:solidFill>
@@ -6472,7 +6472,7 @@
       </p:sp>
       <p:pic>
         <p:nvPicPr>
-          <p:cNvPr id="10" name="Picture 9" descr="bbf6963a68a0084b.png"/>
+          <p:cNvPr id="10" name="Picture 9" descr="813d8c543037484b.png"/>
           <p:cNvPicPr>
             <a:picLocks noChangeAspect="1"/>
           </p:cNvPicPr>
@@ -6486,8 +6486,8 @@
         </p:blipFill>
         <p:spPr>
           <a:xfrm>
-            <a:off x="5574957" y="2225040"/>
-            <a:ext cx="1115568" cy="350520"/>
+            <a:off x="3922007" y="1938527"/>
+            <a:ext cx="902208" cy="283464"/>
           </a:xfrm>
           <a:prstGeom prst="rect">
             <a:avLst/>
@@ -6502,8 +6502,8 @@
         </p:nvSpPr>
         <p:spPr>
           <a:xfrm>
-            <a:off x="6690525" y="2171700"/>
-            <a:ext cx="2938628" cy="457200"/>
+            <a:off x="4824215" y="1851660"/>
+            <a:ext cx="2728810" cy="457200"/>
           </a:xfrm>
           <a:prstGeom prst="rect">
             <a:avLst/>
@@ -6518,7 +6518,7 @@
           <a:p>
             <a:pPr algn="l"/>
             <a:r>
-              <a:rPr sz="2600" b="0" i="0">
+              <a:rPr sz="2400" b="0" i="0">
                 <a:solidFill>
                   <a:srgbClr val="1A1A1A"/>
                 </a:solidFill>
@@ -6537,8 +6537,8 @@
         </p:nvSpPr>
         <p:spPr>
           <a:xfrm>
-            <a:off x="1505585" y="2857500"/>
-            <a:ext cx="2070171" cy="457200"/>
+            <a:off x="1234440" y="2464308"/>
+            <a:ext cx="1927242" cy="457200"/>
           </a:xfrm>
           <a:prstGeom prst="rect">
             <a:avLst/>
@@ -6553,7 +6553,7 @@
           <a:p>
             <a:pPr algn="l"/>
             <a:r>
-              <a:rPr sz="2600" b="0" i="0">
+              <a:rPr sz="2400" b="0" i="0">
                 <a:solidFill>
                   <a:srgbClr val="1A1A1A"/>
                 </a:solidFill>
@@ -6566,7 +6566,7 @@
       </p:sp>
       <p:pic>
         <p:nvPicPr>
-          <p:cNvPr id="13" name="Picture 12" descr="0a0363f6ab46a485.png"/>
+          <p:cNvPr id="13" name="Picture 12" descr="39bd69d20e0cfe64.png"/>
           <p:cNvPicPr>
             <a:picLocks noChangeAspect="1"/>
           </p:cNvPicPr>
@@ -6580,8 +6580,8 @@
         </p:blipFill>
         <p:spPr>
           <a:xfrm>
-            <a:off x="3438596" y="2912364"/>
-            <a:ext cx="1426464" cy="347472"/>
+            <a:off x="3024522" y="2551176"/>
+            <a:ext cx="1155192" cy="283464"/>
           </a:xfrm>
           <a:prstGeom prst="rect">
             <a:avLst/>
@@ -6596,8 +6596,8 @@
         </p:nvSpPr>
         <p:spPr>
           <a:xfrm>
-            <a:off x="4865060" y="2857500"/>
-            <a:ext cx="5928033" cy="457200"/>
+            <a:off x="4179714" y="2464308"/>
+            <a:ext cx="5488362" cy="457200"/>
           </a:xfrm>
           <a:prstGeom prst="rect">
             <a:avLst/>
@@ -6612,7 +6612,7 @@
           <a:p>
             <a:pPr algn="l"/>
             <a:r>
-              <a:rPr sz="2600" b="0" i="0">
+              <a:rPr sz="2400" b="0" i="0">
                 <a:solidFill>
                   <a:srgbClr val="1A1A1A"/>
                 </a:solidFill>
@@ -6631,23 +6631,23 @@
         </p:nvSpPr>
         <p:spPr>
           <a:xfrm>
-            <a:off x="777240" y="3566160"/>
-            <a:ext cx="10607040" cy="465151"/>
-          </a:xfrm>
-          <a:prstGeom prst="rect">
-            <a:avLst/>
-          </a:prstGeom>
-          <a:noFill/>
-        </p:spPr>
-        <p:txBody>
-          <a:bodyPr wrap="square" lIns="45720" rIns="45720" tIns="18288" bIns="18288" anchor="t">
-            <a:spAutoFit/>
-          </a:bodyPr>
-          <a:lstStyle/>
-          <a:p>
-            <a:pPr algn="ctr"/>
-            <a:r>
-              <a:rPr sz="2600" b="0" i="0">
+            <a:off x="1234440" y="3099816"/>
+            <a:ext cx="10058400" cy="429370"/>
+          </a:xfrm>
+          <a:prstGeom prst="rect">
+            <a:avLst/>
+          </a:prstGeom>
+          <a:noFill/>
+        </p:spPr>
+        <p:txBody>
+          <a:bodyPr wrap="square" lIns="45720" rIns="45720" tIns="18288" bIns="18288" anchor="t">
+            <a:spAutoFit/>
+          </a:bodyPr>
+          <a:lstStyle/>
+          <a:p>
+            <a:pPr algn="l"/>
+            <a:r>
+              <a:rPr sz="2400" b="1" i="0">
                 <a:solidFill>
                   <a:srgbClr val="1A1A1A"/>
                 </a:solidFill>
@@ -6689,41 +6689,6 @@
                 <a:latin typeface="Century Schoolbook"/>
               </a:rPr>
               <a:t>Answer it.</a:t>
-            </a:r>
-          </a:p>
-        </p:txBody>
-      </p:sp>
-      <p:sp>
-        <p:nvSpPr>
-          <p:cNvPr id="17" name="TextBox 16"/>
-          <p:cNvSpPr txBox="1"/>
-          <p:nvPr/>
-        </p:nvSpPr>
-        <p:spPr>
-          <a:xfrm>
-            <a:off x="777240" y="4828032"/>
-            <a:ext cx="10607040" cy="365760"/>
-          </a:xfrm>
-          <a:prstGeom prst="rect">
-            <a:avLst/>
-          </a:prstGeom>
-          <a:noFill/>
-        </p:spPr>
-        <p:txBody>
-          <a:bodyPr wrap="square" lIns="45720" rIns="45720" tIns="18288" bIns="18288" anchor="t">
-            <a:spAutoFit/>
-          </a:bodyPr>
-          <a:lstStyle/>
-          <a:p>
-            <a:pPr algn="ctr"/>
-            <a:r>
-              <a:rPr sz="1900" b="0" i="1">
-                <a:solidFill>
-                  <a:srgbClr val="6B6B6B"/>
-                </a:solidFill>
-                <a:latin typeface="Century Schoolbook"/>
-              </a:rPr>
-              <a:t>Rate times time.</a:t>
             </a:r>
           </a:p>
         </p:txBody>
@@ -6999,8 +6964,8 @@
         </p:nvSpPr>
         <p:spPr>
           <a:xfrm>
-            <a:off x="2669526" y="2080260"/>
-            <a:ext cx="3042590" cy="457200"/>
+            <a:off x="1234440" y="1851660"/>
+            <a:ext cx="2824727" cy="457200"/>
           </a:xfrm>
           <a:prstGeom prst="rect">
             <a:avLst/>
@@ -7015,7 +6980,7 @@
           <a:p>
             <a:pPr algn="l"/>
             <a:r>
-              <a:rPr sz="2600" b="0" i="0">
+              <a:rPr sz="2400" b="0" i="0">
                 <a:solidFill>
                   <a:srgbClr val="1A1A1A"/>
                 </a:solidFill>
@@ -7028,7 +6993,7 @@
       </p:sp>
       <p:pic>
         <p:nvPicPr>
-          <p:cNvPr id="10" name="Picture 9" descr="112c6d7561d1ceb4.png"/>
+          <p:cNvPr id="10" name="Picture 9" descr="00df9fb5b7ec9fd3.png"/>
           <p:cNvPicPr>
             <a:picLocks noChangeAspect="1"/>
           </p:cNvPicPr>
@@ -7042,8 +7007,8 @@
         </p:blipFill>
         <p:spPr>
           <a:xfrm>
-            <a:off x="5574957" y="2133599"/>
-            <a:ext cx="1115568" cy="350520"/>
+            <a:off x="3922007" y="1938527"/>
+            <a:ext cx="905256" cy="283464"/>
           </a:xfrm>
           <a:prstGeom prst="rect">
             <a:avLst/>
@@ -7058,8 +7023,8 @@
         </p:nvSpPr>
         <p:spPr>
           <a:xfrm>
-            <a:off x="6690525" y="2080260"/>
-            <a:ext cx="2938628" cy="457200"/>
+            <a:off x="4827263" y="1851660"/>
+            <a:ext cx="2728810" cy="457200"/>
           </a:xfrm>
           <a:prstGeom prst="rect">
             <a:avLst/>
@@ -7074,7 +7039,7 @@
           <a:p>
             <a:pPr algn="l"/>
             <a:r>
-              <a:rPr sz="2600" b="0" i="0">
+              <a:rPr sz="2400" b="0" i="0">
                 <a:solidFill>
                   <a:srgbClr val="1A1A1A"/>
                 </a:solidFill>
@@ -7093,8 +7058,8 @@
         </p:nvSpPr>
         <p:spPr>
           <a:xfrm>
-            <a:off x="1505585" y="2766060"/>
-            <a:ext cx="2070171" cy="457200"/>
+            <a:off x="1234440" y="2464308"/>
+            <a:ext cx="1927242" cy="457200"/>
           </a:xfrm>
           <a:prstGeom prst="rect">
             <a:avLst/>
@@ -7109,7 +7074,7 @@
           <a:p>
             <a:pPr algn="l"/>
             <a:r>
-              <a:rPr sz="2600" b="0" i="0">
+              <a:rPr sz="2400" b="0" i="0">
                 <a:solidFill>
                   <a:srgbClr val="1A1A1A"/>
                 </a:solidFill>
@@ -7122,7 +7087,7 @@
       </p:sp>
       <p:pic>
         <p:nvPicPr>
-          <p:cNvPr id="13" name="Picture 12" descr="5f24531f1f03185a.png"/>
+          <p:cNvPr id="13" name="Picture 12" descr="a80742e4b94b4b64.png"/>
           <p:cNvPicPr>
             <a:picLocks noChangeAspect="1"/>
           </p:cNvPicPr>
@@ -7136,8 +7101,8 @@
         </p:blipFill>
         <p:spPr>
           <a:xfrm>
-            <a:off x="3438596" y="2820924"/>
-            <a:ext cx="1426464" cy="347472"/>
+            <a:off x="3024522" y="2551176"/>
+            <a:ext cx="1155192" cy="283464"/>
           </a:xfrm>
           <a:prstGeom prst="rect">
             <a:avLst/>
@@ -7152,8 +7117,8 @@
         </p:nvSpPr>
         <p:spPr>
           <a:xfrm>
-            <a:off x="4865060" y="2766060"/>
-            <a:ext cx="5928033" cy="457200"/>
+            <a:off x="4179714" y="2464308"/>
+            <a:ext cx="5488362" cy="457200"/>
           </a:xfrm>
           <a:prstGeom prst="rect">
             <a:avLst/>
@@ -7168,7 +7133,7 @@
           <a:p>
             <a:pPr algn="l"/>
             <a:r>
-              <a:rPr sz="2600" b="0" i="0">
+              <a:rPr sz="2400" b="0" i="0">
                 <a:solidFill>
                   <a:srgbClr val="1A1A1A"/>
                 </a:solidFill>
@@ -7187,8 +7152,43 @@
         </p:nvSpPr>
         <p:spPr>
           <a:xfrm>
-            <a:off x="777240" y="3474720"/>
-            <a:ext cx="10607040" cy="465151"/>
+            <a:off x="1234440" y="3099816"/>
+            <a:ext cx="10058400" cy="429370"/>
+          </a:xfrm>
+          <a:prstGeom prst="rect">
+            <a:avLst/>
+          </a:prstGeom>
+          <a:noFill/>
+        </p:spPr>
+        <p:txBody>
+          <a:bodyPr wrap="square" lIns="45720" rIns="45720" tIns="18288" bIns="18288" anchor="t">
+            <a:spAutoFit/>
+          </a:bodyPr>
+          <a:lstStyle/>
+          <a:p>
+            <a:pPr algn="l"/>
+            <a:r>
+              <a:rPr sz="2400" b="1" i="0">
+                <a:solidFill>
+                  <a:srgbClr val="1A1A1A"/>
+                </a:solidFill>
+                <a:latin typeface="Century Schoolbook"/>
+              </a:rPr>
+              <a:t>How many copies does it make?</a:t>
+            </a:r>
+          </a:p>
+        </p:txBody>
+      </p:sp>
+      <p:sp>
+        <p:nvSpPr>
+          <p:cNvPr id="16" name="TextBox 15"/>
+          <p:cNvSpPr txBox="1"/>
+          <p:nvPr/>
+        </p:nvSpPr>
+        <p:spPr>
+          <a:xfrm>
+            <a:off x="1828800" y="3730354"/>
+            <a:ext cx="8503920" cy="548640"/>
           </a:xfrm>
           <a:prstGeom prst="rect">
             <a:avLst/>
@@ -7203,41 +7203,6 @@
           <a:p>
             <a:pPr algn="ctr"/>
             <a:r>
-              <a:rPr sz="2600" b="0" i="0">
-                <a:solidFill>
-                  <a:srgbClr val="1A1A1A"/>
-                </a:solidFill>
-                <a:latin typeface="Century Schoolbook"/>
-              </a:rPr>
-              <a:t>How many copies does it make?</a:t>
-            </a:r>
-          </a:p>
-        </p:txBody>
-      </p:sp>
-      <p:sp>
-        <p:nvSpPr>
-          <p:cNvPr id="16" name="TextBox 15"/>
-          <p:cNvSpPr txBox="1"/>
-          <p:nvPr/>
-        </p:nvSpPr>
-        <p:spPr>
-          <a:xfrm>
-            <a:off x="1828800" y="4095319"/>
-            <a:ext cx="8503920" cy="548640"/>
-          </a:xfrm>
-          <a:prstGeom prst="rect">
-            <a:avLst/>
-          </a:prstGeom>
-          <a:noFill/>
-        </p:spPr>
-        <p:txBody>
-          <a:bodyPr wrap="square" lIns="45720" rIns="45720" tIns="18288" bIns="18288" anchor="t">
-            <a:spAutoFit/>
-          </a:bodyPr>
-          <a:lstStyle/>
-          <a:p>
-            <a:pPr algn="ctr"/>
-            <a:r>
               <a:rPr sz="2400" b="0" i="0">
                 <a:solidFill>
                   <a:srgbClr val="6B6B6B"/>
@@ -7275,7 +7240,7 @@
         </p:nvSpPr>
         <p:spPr>
           <a:xfrm>
-            <a:off x="777240" y="4826839"/>
+            <a:off x="777240" y="4663440"/>
             <a:ext cx="10607040" cy="548640"/>
           </a:xfrm>
           <a:prstGeom prst="rect">

--- a/a7/build/out/u4/A7 4.02  Slides.pptx
+++ b/a7/build/out/u4/A7 4.02  Slides.pptx
@@ -3442,7 +3442,7 @@
                 </a:solidFill>
                 <a:latin typeface="Century Schoolbook"/>
               </a:rPr>
-              <a:t>Today they do not have to match at all — and they can be as far apart as they like.</a:t>
+              <a:t>Today the powers of ten do not have to match at all.</a:t>
             </a:r>
           </a:p>
         </p:txBody>
